--- a/Backend/services/pptx-generator-service/slides/quadra_tenis/cores_piso_asfaltico.pptx
+++ b/Backend/services/pptx-generator-service/slides/quadra_tenis/cores_piso_asfaltico.pptx
@@ -1,19 +1,22 @@
 
 <file path=ppt/presentation.xml><?xml version="1.0" encoding="utf-8"?>
-<p:presentation xmlns:a="http://schemas.openxmlformats.org/drawingml/2006/main" xmlns:r="http://schemas.openxmlformats.org/officeDocument/2006/relationships" xmlns:p="http://schemas.openxmlformats.org/presentationml/2006/main" saveSubsetFonts="1" autoCompressPictures="0">
+<p:presentation xmlns:a="http://schemas.openxmlformats.org/drawingml/2006/main" xmlns:r="http://schemas.openxmlformats.org/officeDocument/2006/relationships" xmlns:p="http://schemas.openxmlformats.org/presentationml/2006/main" saveSubsetFonts="1">
   <p:sldMasterIdLst>
     <p:sldMasterId id="2147483648" r:id="rId1"/>
   </p:sldMasterIdLst>
+  <p:notesMasterIdLst>
+    <p:notesMasterId r:id="rId3"/>
+  </p:notesMasterIdLst>
   <p:sldIdLst>
-    <p:sldId id="266" r:id="rId2"/>
+    <p:sldId id="368" r:id="rId2"/>
   </p:sldIdLst>
-  <p:sldSz cx="12188825" cy="6858000"/>
+  <p:sldSz cx="12192000" cy="6858000"/>
   <p:notesSz cx="6858000" cy="9144000"/>
   <p:defaultTextStyle>
     <a:defPPr>
-      <a:defRPr lang="en-US"/>
+      <a:defRPr lang="de-DE"/>
     </a:defPPr>
-    <a:lvl1pPr marL="0" algn="l" defTabSz="457200" rtl="0" eaLnBrk="1" latinLnBrk="0" hangingPunct="1">
+    <a:lvl1pPr marL="0" algn="l" defTabSz="914400" rtl="0" eaLnBrk="1" latinLnBrk="0" hangingPunct="1">
       <a:defRPr sz="1800" kern="1200">
         <a:solidFill>
           <a:schemeClr val="tx1"/>
@@ -23,7 +26,7 @@
         <a:cs typeface="+mn-cs"/>
       </a:defRPr>
     </a:lvl1pPr>
-    <a:lvl2pPr marL="457200" algn="l" defTabSz="457200" rtl="0" eaLnBrk="1" latinLnBrk="0" hangingPunct="1">
+    <a:lvl2pPr marL="457200" algn="l" defTabSz="914400" rtl="0" eaLnBrk="1" latinLnBrk="0" hangingPunct="1">
       <a:defRPr sz="1800" kern="1200">
         <a:solidFill>
           <a:schemeClr val="tx1"/>
@@ -33,7 +36,7 @@
         <a:cs typeface="+mn-cs"/>
       </a:defRPr>
     </a:lvl2pPr>
-    <a:lvl3pPr marL="914400" algn="l" defTabSz="457200" rtl="0" eaLnBrk="1" latinLnBrk="0" hangingPunct="1">
+    <a:lvl3pPr marL="914400" algn="l" defTabSz="914400" rtl="0" eaLnBrk="1" latinLnBrk="0" hangingPunct="1">
       <a:defRPr sz="1800" kern="1200">
         <a:solidFill>
           <a:schemeClr val="tx1"/>
@@ -43,7 +46,7 @@
         <a:cs typeface="+mn-cs"/>
       </a:defRPr>
     </a:lvl3pPr>
-    <a:lvl4pPr marL="1371600" algn="l" defTabSz="457200" rtl="0" eaLnBrk="1" latinLnBrk="0" hangingPunct="1">
+    <a:lvl4pPr marL="1371600" algn="l" defTabSz="914400" rtl="0" eaLnBrk="1" latinLnBrk="0" hangingPunct="1">
       <a:defRPr sz="1800" kern="1200">
         <a:solidFill>
           <a:schemeClr val="tx1"/>
@@ -53,7 +56,7 @@
         <a:cs typeface="+mn-cs"/>
       </a:defRPr>
     </a:lvl4pPr>
-    <a:lvl5pPr marL="1828800" algn="l" defTabSz="457200" rtl="0" eaLnBrk="1" latinLnBrk="0" hangingPunct="1">
+    <a:lvl5pPr marL="1828800" algn="l" defTabSz="914400" rtl="0" eaLnBrk="1" latinLnBrk="0" hangingPunct="1">
       <a:defRPr sz="1800" kern="1200">
         <a:solidFill>
           <a:schemeClr val="tx1"/>
@@ -63,7 +66,7 @@
         <a:cs typeface="+mn-cs"/>
       </a:defRPr>
     </a:lvl5pPr>
-    <a:lvl6pPr marL="2286000" algn="l" defTabSz="457200" rtl="0" eaLnBrk="1" latinLnBrk="0" hangingPunct="1">
+    <a:lvl6pPr marL="2286000" algn="l" defTabSz="914400" rtl="0" eaLnBrk="1" latinLnBrk="0" hangingPunct="1">
       <a:defRPr sz="1800" kern="1200">
         <a:solidFill>
           <a:schemeClr val="tx1"/>
@@ -73,7 +76,7 @@
         <a:cs typeface="+mn-cs"/>
       </a:defRPr>
     </a:lvl6pPr>
-    <a:lvl7pPr marL="2743200" algn="l" defTabSz="457200" rtl="0" eaLnBrk="1" latinLnBrk="0" hangingPunct="1">
+    <a:lvl7pPr marL="2743200" algn="l" defTabSz="914400" rtl="0" eaLnBrk="1" latinLnBrk="0" hangingPunct="1">
       <a:defRPr sz="1800" kern="1200">
         <a:solidFill>
           <a:schemeClr val="tx1"/>
@@ -83,7 +86,7 @@
         <a:cs typeface="+mn-cs"/>
       </a:defRPr>
     </a:lvl7pPr>
-    <a:lvl8pPr marL="3200400" algn="l" defTabSz="457200" rtl="0" eaLnBrk="1" latinLnBrk="0" hangingPunct="1">
+    <a:lvl8pPr marL="3200400" algn="l" defTabSz="914400" rtl="0" eaLnBrk="1" latinLnBrk="0" hangingPunct="1">
       <a:defRPr sz="1800" kern="1200">
         <a:solidFill>
           <a:schemeClr val="tx1"/>
@@ -93,7 +96,7 @@
         <a:cs typeface="+mn-cs"/>
       </a:defRPr>
     </a:lvl8pPr>
-    <a:lvl9pPr marL="3657600" algn="l" defTabSz="457200" rtl="0" eaLnBrk="1" latinLnBrk="0" hangingPunct="1">
+    <a:lvl9pPr marL="3657600" algn="l" defTabSz="914400" rtl="0" eaLnBrk="1" latinLnBrk="0" hangingPunct="1">
       <a:defRPr sz="1800" kern="1200">
         <a:solidFill>
           <a:schemeClr val="tx1"/>
@@ -106,18 +109,7 @@
   </p:defaultTextStyle>
   <p:extLst>
     <p:ext uri="{EFAFB233-063F-42B5-8137-9DF3F51BA10A}">
-      <p15:sldGuideLst xmlns:p15="http://schemas.microsoft.com/office/powerpoint/2012/main">
-        <p15:guide id="1" orient="horz" pos="2160">
-          <p15:clr>
-            <a:srgbClr val="A4A3A4"/>
-          </p15:clr>
-        </p15:guide>
-        <p15:guide id="2" pos="2880">
-          <p15:clr>
-            <a:srgbClr val="A4A3A4"/>
-          </p15:clr>
-        </p15:guide>
-      </p15:sldGuideLst>
+      <p15:sldGuideLst xmlns:p15="http://schemas.microsoft.com/office/powerpoint/2012/main"/>
     </p:ext>
   </p:extLst>
 </p:presentation>
@@ -126,14 +118,19 @@
 <file path=ppt/revisionInfo.xml><?xml version="1.0" encoding="utf-8"?>
 <p1510:revInfo xmlns:a="http://schemas.openxmlformats.org/drawingml/2006/main" xmlns:r="http://schemas.openxmlformats.org/officeDocument/2006/relationships" xmlns:p1510="http://schemas.microsoft.com/office/powerpoint/2015/10/main">
   <p1510:revLst>
-    <p1510:client id="{5EF45CD2-28EE-FA76-812A-BE4C9F5FF4E1}" v="21" dt="2026-05-20T00:41:27.599"/>
+    <p1510:client id="{F8BE7604-E0B3-3FB1-EFCE-F179902781A9}" v="34" dt="2026-05-29T18:46:13.407"/>
   </p1510:revLst>
 </p1510:revInfo>
 </file>
 
-<file path=ppt/slideLayouts/slideLayout1.xml><?xml version="1.0" encoding="utf-8"?>
-<p:sldLayout xmlns:a="http://schemas.openxmlformats.org/drawingml/2006/main" xmlns:r="http://schemas.openxmlformats.org/officeDocument/2006/relationships" xmlns:p="http://schemas.openxmlformats.org/presentationml/2006/main" type="title" preserve="1">
-  <p:cSld name="Title Slide">
+<file path=ppt/notesMasters/notesMaster1.xml><?xml version="1.0" encoding="utf-8"?>
+<p:notesMaster xmlns:a="http://schemas.openxmlformats.org/drawingml/2006/main" xmlns:r="http://schemas.openxmlformats.org/officeDocument/2006/relationships" xmlns:p="http://schemas.openxmlformats.org/presentationml/2006/main">
+  <p:cSld>
+    <p:bg>
+      <p:bgRef idx="1001">
+        <a:schemeClr val="bg1"/>
+      </p:bgRef>
+    </p:bg>
     <p:spTree>
       <p:nvGrpSpPr>
         <p:cNvPr id="1" name=""/>
@@ -150,230 +147,332 @@
       </p:grpSpPr>
       <p:sp>
         <p:nvSpPr>
-          <p:cNvPr id="2" name="Title 1"/>
+          <p:cNvPr id="2" name="Espaço Reservado para Cabeçalho 1"/>
           <p:cNvSpPr>
             <a:spLocks noGrp="1"/>
           </p:cNvSpPr>
           <p:nvPr>
-            <p:ph type="ctrTitle"/>
+            <p:ph type="hdr" sz="quarter"/>
           </p:nvPr>
         </p:nvSpPr>
         <p:spPr>
           <a:xfrm>
-            <a:off x="685800" y="2130425"/>
-            <a:ext cx="7772400" cy="1470025"/>
+            <a:off x="0" y="0"/>
+            <a:ext cx="2971800" cy="458788"/>
           </a:xfrm>
+          <a:prstGeom prst="rect">
+            <a:avLst/>
+          </a:prstGeom>
         </p:spPr>
         <p:txBody>
-          <a:bodyPr/>
-          <a:lstStyle/>
-          <a:p>
-            <a:r>
-              <a:rPr lang="en-US"/>
-              <a:t>Click to edit Master title style</a:t>
-            </a:r>
+          <a:bodyPr vert="horz" lIns="91440" tIns="45720" rIns="91440" bIns="45720" rtlCol="0"/>
+          <a:lstStyle>
+            <a:lvl1pPr algn="l">
+              <a:defRPr sz="1200"/>
+            </a:lvl1pPr>
+          </a:lstStyle>
+          <a:p>
+            <a:endParaRPr lang="pt-BR"/>
           </a:p>
         </p:txBody>
       </p:sp>
       <p:sp>
         <p:nvSpPr>
-          <p:cNvPr id="3" name="Subtitle 2"/>
+          <p:cNvPr id="3" name="Espaço Reservado para Data 2"/>
           <p:cNvSpPr>
             <a:spLocks noGrp="1"/>
           </p:cNvSpPr>
           <p:nvPr>
-            <p:ph type="subTitle" idx="1"/>
+            <p:ph type="dt" idx="1"/>
           </p:nvPr>
         </p:nvSpPr>
         <p:spPr>
           <a:xfrm>
-            <a:off x="1371600" y="3886200"/>
-            <a:ext cx="6400800" cy="1752600"/>
+            <a:off x="3884613" y="0"/>
+            <a:ext cx="2971800" cy="458788"/>
           </a:xfrm>
+          <a:prstGeom prst="rect">
+            <a:avLst/>
+          </a:prstGeom>
         </p:spPr>
         <p:txBody>
-          <a:bodyPr/>
+          <a:bodyPr vert="horz" lIns="91440" tIns="45720" rIns="91440" bIns="45720" rtlCol="0"/>
           <a:lstStyle>
-            <a:lvl1pPr marL="0" indent="0" algn="ctr">
-              <a:buNone/>
-              <a:defRPr>
-                <a:solidFill>
-                  <a:schemeClr val="tx1">
-                    <a:tint val="75000"/>
-                  </a:schemeClr>
-                </a:solidFill>
-              </a:defRPr>
+            <a:lvl1pPr algn="r">
+              <a:defRPr sz="1200"/>
             </a:lvl1pPr>
-            <a:lvl2pPr marL="457200" indent="0" algn="ctr">
-              <a:buNone/>
-              <a:defRPr>
-                <a:solidFill>
-                  <a:schemeClr val="tx1">
-                    <a:tint val="75000"/>
-                  </a:schemeClr>
-                </a:solidFill>
-              </a:defRPr>
-            </a:lvl2pPr>
-            <a:lvl3pPr marL="914400" indent="0" algn="ctr">
-              <a:buNone/>
-              <a:defRPr>
-                <a:solidFill>
-                  <a:schemeClr val="tx1">
-                    <a:tint val="75000"/>
-                  </a:schemeClr>
-                </a:solidFill>
-              </a:defRPr>
-            </a:lvl3pPr>
-            <a:lvl4pPr marL="1371600" indent="0" algn="ctr">
-              <a:buNone/>
-              <a:defRPr>
-                <a:solidFill>
-                  <a:schemeClr val="tx1">
-                    <a:tint val="75000"/>
-                  </a:schemeClr>
-                </a:solidFill>
-              </a:defRPr>
-            </a:lvl4pPr>
-            <a:lvl5pPr marL="1828800" indent="0" algn="ctr">
-              <a:buNone/>
-              <a:defRPr>
-                <a:solidFill>
-                  <a:schemeClr val="tx1">
-                    <a:tint val="75000"/>
-                  </a:schemeClr>
-                </a:solidFill>
-              </a:defRPr>
-            </a:lvl5pPr>
-            <a:lvl6pPr marL="2286000" indent="0" algn="ctr">
-              <a:buNone/>
-              <a:defRPr>
-                <a:solidFill>
-                  <a:schemeClr val="tx1">
-                    <a:tint val="75000"/>
-                  </a:schemeClr>
-                </a:solidFill>
-              </a:defRPr>
-            </a:lvl6pPr>
-            <a:lvl7pPr marL="2743200" indent="0" algn="ctr">
-              <a:buNone/>
-              <a:defRPr>
-                <a:solidFill>
-                  <a:schemeClr val="tx1">
-                    <a:tint val="75000"/>
-                  </a:schemeClr>
-                </a:solidFill>
-              </a:defRPr>
-            </a:lvl7pPr>
-            <a:lvl8pPr marL="3200400" indent="0" algn="ctr">
-              <a:buNone/>
-              <a:defRPr>
-                <a:solidFill>
-                  <a:schemeClr val="tx1">
-                    <a:tint val="75000"/>
-                  </a:schemeClr>
-                </a:solidFill>
-              </a:defRPr>
-            </a:lvl8pPr>
-            <a:lvl9pPr marL="3657600" indent="0" algn="ctr">
-              <a:buNone/>
-              <a:defRPr>
-                <a:solidFill>
-                  <a:schemeClr val="tx1">
-                    <a:tint val="75000"/>
-                  </a:schemeClr>
-                </a:solidFill>
-              </a:defRPr>
-            </a:lvl9pPr>
           </a:lstStyle>
           <a:p>
-            <a:r>
-              <a:rPr lang="en-US"/>
-              <a:t>Click to edit Master subtitle style</a:t>
-            </a:r>
+            <a:fld id="{5A375547-A38A-4F7F-85A0-379E95BA7E55}" type="datetimeFigureOut">
+              <a:t>29/05/2026</a:t>
+            </a:fld>
+            <a:endParaRPr lang="pt-BR"/>
           </a:p>
         </p:txBody>
       </p:sp>
       <p:sp>
         <p:nvSpPr>
-          <p:cNvPr id="4" name="Date Placeholder 3"/>
+          <p:cNvPr id="4" name="Espaço Reservado para Imagem de Slide 3"/>
+          <p:cNvSpPr>
+            <a:spLocks noGrp="1" noRot="1" noChangeAspect="1"/>
+          </p:cNvSpPr>
+          <p:nvPr>
+            <p:ph type="sldImg" idx="2"/>
+          </p:nvPr>
+        </p:nvSpPr>
+        <p:spPr>
+          <a:xfrm>
+            <a:off x="685800" y="1143000"/>
+            <a:ext cx="5486400" cy="3086100"/>
+          </a:xfrm>
+          <a:prstGeom prst="rect">
+            <a:avLst/>
+          </a:prstGeom>
+          <a:noFill/>
+          <a:ln w="12700">
+            <a:solidFill>
+              <a:prstClr val="black"/>
+            </a:solidFill>
+          </a:ln>
+        </p:spPr>
+        <p:txBody>
+          <a:bodyPr vert="horz" lIns="91440" tIns="45720" rIns="91440" bIns="45720" rtlCol="0" anchor="ctr"/>
+          <a:lstStyle/>
+          <a:p>
+            <a:endParaRPr lang="pt-BR"/>
+          </a:p>
+        </p:txBody>
+      </p:sp>
+      <p:sp>
+        <p:nvSpPr>
+          <p:cNvPr id="5" name="Espaço Reservado para Anotações 4"/>
           <p:cNvSpPr>
             <a:spLocks noGrp="1"/>
           </p:cNvSpPr>
           <p:nvPr>
-            <p:ph type="dt" sz="half" idx="10"/>
+            <p:ph type="body" sz="quarter" idx="3"/>
           </p:nvPr>
         </p:nvSpPr>
-        <p:spPr/>
+        <p:spPr>
+          <a:xfrm>
+            <a:off x="685800" y="4400550"/>
+            <a:ext cx="5486400" cy="3600450"/>
+          </a:xfrm>
+          <a:prstGeom prst="rect">
+            <a:avLst/>
+          </a:prstGeom>
+        </p:spPr>
         <p:txBody>
-          <a:bodyPr/>
+          <a:bodyPr vert="horz" lIns="91440" tIns="45720" rIns="91440" bIns="45720" rtlCol="0"/>
           <a:lstStyle/>
           <a:p>
-            <a:fld id="{5BCAD085-E8A6-8845-BD4E-CB4CCA059FC4}" type="datetimeFigureOut">
-              <a:rPr lang="en-US" smtClean="0"/>
-              <a:t>5/19/2026</a:t>
-            </a:fld>
-            <a:endParaRPr lang="en-US"/>
+            <a:pPr lvl="0"/>
+            <a:r>
+              <a:rPr lang="pt-BR"/>
+              <a:t>Clique para editar os estilos de texto Mestres</a:t>
+            </a:r>
+          </a:p>
+          <a:p>
+            <a:pPr lvl="1"/>
+            <a:r>
+              <a:rPr lang="pt-BR"/>
+              <a:t>Segundo nível</a:t>
+            </a:r>
+          </a:p>
+          <a:p>
+            <a:pPr lvl="2"/>
+            <a:r>
+              <a:rPr lang="pt-BR"/>
+              <a:t>Terceiro nível</a:t>
+            </a:r>
+          </a:p>
+          <a:p>
+            <a:pPr lvl="3"/>
+            <a:r>
+              <a:rPr lang="pt-BR"/>
+              <a:t>Quarto nível</a:t>
+            </a:r>
+          </a:p>
+          <a:p>
+            <a:pPr lvl="4"/>
+            <a:r>
+              <a:rPr lang="pt-BR"/>
+              <a:t>Quinto nível</a:t>
+            </a:r>
           </a:p>
         </p:txBody>
       </p:sp>
       <p:sp>
         <p:nvSpPr>
-          <p:cNvPr id="5" name="Footer Placeholder 4"/>
+          <p:cNvPr id="6" name="Espaço Reservado para Rodapé 5"/>
           <p:cNvSpPr>
             <a:spLocks noGrp="1"/>
           </p:cNvSpPr>
           <p:nvPr>
-            <p:ph type="ftr" sz="quarter" idx="11"/>
+            <p:ph type="ftr" sz="quarter" idx="4"/>
           </p:nvPr>
         </p:nvSpPr>
-        <p:spPr/>
+        <p:spPr>
+          <a:xfrm>
+            <a:off x="0" y="8685213"/>
+            <a:ext cx="2971800" cy="458787"/>
+          </a:xfrm>
+          <a:prstGeom prst="rect">
+            <a:avLst/>
+          </a:prstGeom>
+        </p:spPr>
         <p:txBody>
-          <a:bodyPr/>
-          <a:lstStyle/>
-          <a:p>
-            <a:endParaRPr lang="en-US"/>
+          <a:bodyPr vert="horz" lIns="91440" tIns="45720" rIns="91440" bIns="45720" rtlCol="0" anchor="b"/>
+          <a:lstStyle>
+            <a:lvl1pPr algn="l">
+              <a:defRPr sz="1200"/>
+            </a:lvl1pPr>
+          </a:lstStyle>
+          <a:p>
+            <a:endParaRPr lang="pt-BR"/>
           </a:p>
         </p:txBody>
       </p:sp>
       <p:sp>
         <p:nvSpPr>
-          <p:cNvPr id="6" name="Slide Number Placeholder 5"/>
+          <p:cNvPr id="7" name="Espaço Reservado para Número de Slide 6"/>
           <p:cNvSpPr>
             <a:spLocks noGrp="1"/>
           </p:cNvSpPr>
           <p:nvPr>
-            <p:ph type="sldNum" sz="quarter" idx="12"/>
+            <p:ph type="sldNum" sz="quarter" idx="5"/>
           </p:nvPr>
         </p:nvSpPr>
-        <p:spPr/>
+        <p:spPr>
+          <a:xfrm>
+            <a:off x="3884613" y="8685213"/>
+            <a:ext cx="2971800" cy="458787"/>
+          </a:xfrm>
+          <a:prstGeom prst="rect">
+            <a:avLst/>
+          </a:prstGeom>
+        </p:spPr>
         <p:txBody>
-          <a:bodyPr/>
-          <a:lstStyle/>
-          <a:p>
-            <a:fld id="{C1FF6DA9-008F-8B48-92A6-B652298478BF}" type="slidenum">
-              <a:rPr lang="en-US" smtClean="0"/>
+          <a:bodyPr vert="horz" lIns="91440" tIns="45720" rIns="91440" bIns="45720" rtlCol="0" anchor="b"/>
+          <a:lstStyle>
+            <a:lvl1pPr algn="r">
+              <a:defRPr sz="1200"/>
+            </a:lvl1pPr>
+          </a:lstStyle>
+          <a:p>
+            <a:fld id="{561DEBD3-5FAE-4043-9680-B92998E07856}" type="slidenum">
               <a:t>‹nº›</a:t>
             </a:fld>
-            <a:endParaRPr lang="en-US"/>
+            <a:endParaRPr lang="pt-BR"/>
           </a:p>
         </p:txBody>
       </p:sp>
     </p:spTree>
     <p:extLst>
       <p:ext uri="{BB962C8B-B14F-4D97-AF65-F5344CB8AC3E}">
-        <p14:creationId xmlns:p14="http://schemas.microsoft.com/office/powerpoint/2010/main" val="3168075583"/>
+        <p14:creationId xmlns:p14="http://schemas.microsoft.com/office/powerpoint/2010/main" val="3336040786"/>
       </p:ext>
     </p:extLst>
   </p:cSld>
-  <p:clrMapOvr>
-    <a:masterClrMapping/>
-  </p:clrMapOvr>
-</p:sldLayout>
+  <p:clrMap bg1="lt1" tx1="dk1" bg2="lt2" tx2="dk2" accent1="accent1" accent2="accent2" accent3="accent3" accent4="accent4" accent5="accent5" accent6="accent6" hlink="hlink" folHlink="folHlink"/>
+  <p:notesStyle>
+    <a:lvl1pPr marL="0" algn="l" defTabSz="914400" rtl="0" eaLnBrk="1" latinLnBrk="0" hangingPunct="1">
+      <a:defRPr sz="1200" kern="1200">
+        <a:solidFill>
+          <a:schemeClr val="tx1"/>
+        </a:solidFill>
+        <a:latin typeface="+mn-lt"/>
+        <a:ea typeface="+mn-ea"/>
+        <a:cs typeface="+mn-cs"/>
+      </a:defRPr>
+    </a:lvl1pPr>
+    <a:lvl2pPr marL="457200" algn="l" defTabSz="914400" rtl="0" eaLnBrk="1" latinLnBrk="0" hangingPunct="1">
+      <a:defRPr sz="1200" kern="1200">
+        <a:solidFill>
+          <a:schemeClr val="tx1"/>
+        </a:solidFill>
+        <a:latin typeface="+mn-lt"/>
+        <a:ea typeface="+mn-ea"/>
+        <a:cs typeface="+mn-cs"/>
+      </a:defRPr>
+    </a:lvl2pPr>
+    <a:lvl3pPr marL="914400" algn="l" defTabSz="914400" rtl="0" eaLnBrk="1" latinLnBrk="0" hangingPunct="1">
+      <a:defRPr sz="1200" kern="1200">
+        <a:solidFill>
+          <a:schemeClr val="tx1"/>
+        </a:solidFill>
+        <a:latin typeface="+mn-lt"/>
+        <a:ea typeface="+mn-ea"/>
+        <a:cs typeface="+mn-cs"/>
+      </a:defRPr>
+    </a:lvl3pPr>
+    <a:lvl4pPr marL="1371600" algn="l" defTabSz="914400" rtl="0" eaLnBrk="1" latinLnBrk="0" hangingPunct="1">
+      <a:defRPr sz="1200" kern="1200">
+        <a:solidFill>
+          <a:schemeClr val="tx1"/>
+        </a:solidFill>
+        <a:latin typeface="+mn-lt"/>
+        <a:ea typeface="+mn-ea"/>
+        <a:cs typeface="+mn-cs"/>
+      </a:defRPr>
+    </a:lvl4pPr>
+    <a:lvl5pPr marL="1828800" algn="l" defTabSz="914400" rtl="0" eaLnBrk="1" latinLnBrk="0" hangingPunct="1">
+      <a:defRPr sz="1200" kern="1200">
+        <a:solidFill>
+          <a:schemeClr val="tx1"/>
+        </a:solidFill>
+        <a:latin typeface="+mn-lt"/>
+        <a:ea typeface="+mn-ea"/>
+        <a:cs typeface="+mn-cs"/>
+      </a:defRPr>
+    </a:lvl5pPr>
+    <a:lvl6pPr marL="2286000" algn="l" defTabSz="914400" rtl="0" eaLnBrk="1" latinLnBrk="0" hangingPunct="1">
+      <a:defRPr sz="1200" kern="1200">
+        <a:solidFill>
+          <a:schemeClr val="tx1"/>
+        </a:solidFill>
+        <a:latin typeface="+mn-lt"/>
+        <a:ea typeface="+mn-ea"/>
+        <a:cs typeface="+mn-cs"/>
+      </a:defRPr>
+    </a:lvl6pPr>
+    <a:lvl7pPr marL="2743200" algn="l" defTabSz="914400" rtl="0" eaLnBrk="1" latinLnBrk="0" hangingPunct="1">
+      <a:defRPr sz="1200" kern="1200">
+        <a:solidFill>
+          <a:schemeClr val="tx1"/>
+        </a:solidFill>
+        <a:latin typeface="+mn-lt"/>
+        <a:ea typeface="+mn-ea"/>
+        <a:cs typeface="+mn-cs"/>
+      </a:defRPr>
+    </a:lvl7pPr>
+    <a:lvl8pPr marL="3200400" algn="l" defTabSz="914400" rtl="0" eaLnBrk="1" latinLnBrk="0" hangingPunct="1">
+      <a:defRPr sz="1200" kern="1200">
+        <a:solidFill>
+          <a:schemeClr val="tx1"/>
+        </a:solidFill>
+        <a:latin typeface="+mn-lt"/>
+        <a:ea typeface="+mn-ea"/>
+        <a:cs typeface="+mn-cs"/>
+      </a:defRPr>
+    </a:lvl8pPr>
+    <a:lvl9pPr marL="3657600" algn="l" defTabSz="914400" rtl="0" eaLnBrk="1" latinLnBrk="0" hangingPunct="1">
+      <a:defRPr sz="1200" kern="1200">
+        <a:solidFill>
+          <a:schemeClr val="tx1"/>
+        </a:solidFill>
+        <a:latin typeface="+mn-lt"/>
+        <a:ea typeface="+mn-ea"/>
+        <a:cs typeface="+mn-cs"/>
+      </a:defRPr>
+    </a:lvl9pPr>
+  </p:notesStyle>
+</p:notesMaster>
 </file>
 
-<file path=ppt/slideLayouts/slideLayout10.xml><?xml version="1.0" encoding="utf-8"?>
-<p:sldLayout xmlns:a="http://schemas.openxmlformats.org/drawingml/2006/main" xmlns:r="http://schemas.openxmlformats.org/officeDocument/2006/relationships" xmlns:p="http://schemas.openxmlformats.org/presentationml/2006/main" type="vertTx" preserve="1">
-  <p:cSld name="Title and Vertical Text">
+<file path=ppt/notesSlides/notesSlide1.xml><?xml version="1.0" encoding="utf-8"?>
+<p:notes xmlns:a="http://schemas.openxmlformats.org/drawingml/2006/main" xmlns:r="http://schemas.openxmlformats.org/officeDocument/2006/relationships" xmlns:p="http://schemas.openxmlformats.org/presentationml/2006/main">
+  <p:cSld>
     <p:spTree>
       <p:nvGrpSpPr>
         <p:cNvPr id="1" name=""/>
@@ -390,12 +489,12 @@
       </p:grpSpPr>
       <p:sp>
         <p:nvSpPr>
-          <p:cNvPr id="2" name="Title 1"/>
+          <p:cNvPr id="2" name="Espaço Reservado para Imagem de Slide 1"/>
           <p:cNvSpPr>
-            <a:spLocks noGrp="1"/>
+            <a:spLocks noGrp="1" noRot="1" noChangeAspect="1"/>
           </p:cNvSpPr>
           <p:nvPr>
-            <p:ph type="title"/>
+            <p:ph type="sldImg"/>
           </p:nvPr>
         </p:nvSpPr>
         <p:spPr/>
@@ -403,72 +502,18 @@
           <a:bodyPr/>
           <a:lstStyle/>
           <a:p>
-            <a:r>
-              <a:rPr lang="en-US"/>
-              <a:t>Click to edit Master title style</a:t>
-            </a:r>
+            <a:endParaRPr lang="pt-BR"/>
           </a:p>
         </p:txBody>
       </p:sp>
       <p:sp>
         <p:nvSpPr>
-          <p:cNvPr id="3" name="Vertical Text Placeholder 2"/>
+          <p:cNvPr id="3" name="Espaço Reservado para Anotações 2"/>
           <p:cNvSpPr>
             <a:spLocks noGrp="1"/>
           </p:cNvSpPr>
           <p:nvPr>
-            <p:ph type="body" orient="vert" idx="1"/>
-          </p:nvPr>
-        </p:nvSpPr>
-        <p:spPr/>
-        <p:txBody>
-          <a:bodyPr vert="eaVert"/>
-          <a:lstStyle/>
-          <a:p>
-            <a:pPr lvl="0"/>
-            <a:r>
-              <a:rPr lang="en-US"/>
-              <a:t>Click to edit Master text styles</a:t>
-            </a:r>
-          </a:p>
-          <a:p>
-            <a:pPr lvl="1"/>
-            <a:r>
-              <a:rPr lang="en-US"/>
-              <a:t>Second level</a:t>
-            </a:r>
-          </a:p>
-          <a:p>
-            <a:pPr lvl="2"/>
-            <a:r>
-              <a:rPr lang="en-US"/>
-              <a:t>Third level</a:t>
-            </a:r>
-          </a:p>
-          <a:p>
-            <a:pPr lvl="3"/>
-            <a:r>
-              <a:rPr lang="en-US"/>
-              <a:t>Fourth level</a:t>
-            </a:r>
-          </a:p>
-          <a:p>
-            <a:pPr lvl="4"/>
-            <a:r>
-              <a:rPr lang="en-US"/>
-              <a:t>Fifth level</a:t>
-            </a:r>
-          </a:p>
-        </p:txBody>
-      </p:sp>
-      <p:sp>
-        <p:nvSpPr>
-          <p:cNvPr id="4" name="Date Placeholder 3"/>
-          <p:cNvSpPr>
-            <a:spLocks noGrp="1"/>
-          </p:cNvSpPr>
-          <p:nvPr>
-            <p:ph type="dt" sz="half" idx="10"/>
+            <p:ph type="body" idx="1"/>
           </p:nvPr>
         </p:nvSpPr>
         <p:spPr/>
@@ -476,22 +521,18 @@
           <a:bodyPr/>
           <a:lstStyle/>
           <a:p>
-            <a:fld id="{5BCAD085-E8A6-8845-BD4E-CB4CCA059FC4}" type="datetimeFigureOut">
-              <a:rPr lang="en-US" smtClean="0"/>
-              <a:t>5/19/2026</a:t>
-            </a:fld>
-            <a:endParaRPr lang="en-US"/>
+            <a:endParaRPr lang="pt-BR"/>
           </a:p>
         </p:txBody>
       </p:sp>
       <p:sp>
         <p:nvSpPr>
-          <p:cNvPr id="5" name="Footer Placeholder 4"/>
+          <p:cNvPr id="4" name="Espaço Reservado para Número de Slide 3"/>
           <p:cNvSpPr>
             <a:spLocks noGrp="1"/>
           </p:cNvSpPr>
           <p:nvPr>
-            <p:ph type="ftr" sz="quarter" idx="11"/>
+            <p:ph type="sldNum" sz="quarter" idx="5"/>
           </p:nvPr>
         </p:nvSpPr>
         <p:spPr/>
@@ -499,49 +540,90 @@
           <a:bodyPr/>
           <a:lstStyle/>
           <a:p>
-            <a:endParaRPr lang="en-US"/>
-          </a:p>
-        </p:txBody>
-      </p:sp>
-      <p:sp>
-        <p:nvSpPr>
-          <p:cNvPr id="6" name="Slide Number Placeholder 5"/>
-          <p:cNvSpPr>
-            <a:spLocks noGrp="1"/>
-          </p:cNvSpPr>
-          <p:nvPr>
-            <p:ph type="sldNum" sz="quarter" idx="12"/>
-          </p:nvPr>
-        </p:nvSpPr>
-        <p:spPr/>
-        <p:txBody>
-          <a:bodyPr/>
-          <a:lstStyle/>
-          <a:p>
-            <a:fld id="{C1FF6DA9-008F-8B48-92A6-B652298478BF}" type="slidenum">
-              <a:rPr lang="en-US" smtClean="0"/>
-              <a:t>‹nº›</a:t>
+            <a:pPr marL="0" marR="0" lvl="0" indent="0" algn="r" defTabSz="914400" rtl="0" eaLnBrk="1" fontAlgn="auto" latinLnBrk="0" hangingPunct="1">
+              <a:lnSpc>
+                <a:spcPct val="100000"/>
+              </a:lnSpc>
+              <a:spcBef>
+                <a:spcPts val="0"/>
+              </a:spcBef>
+              <a:spcAft>
+                <a:spcPts val="0"/>
+              </a:spcAft>
+              <a:buClrTx/>
+              <a:buSzTx/>
+              <a:buFontTx/>
+              <a:buNone/>
+              <a:tabLst/>
+              <a:defRPr/>
+            </a:pPr>
+            <a:fld id="{C27C740D-A4AF-9C40-8FFB-99FBBDFCF035}" type="slidenum">
+              <a:rPr kumimoji="0" lang="pt-BR" sz="1200" b="0" i="0" u="none" strike="noStrike" kern="1200" cap="none" spc="0" normalizeH="0" baseline="0" noProof="0" smtClean="0">
+                <a:ln>
+                  <a:noFill/>
+                </a:ln>
+                <a:solidFill>
+                  <a:prstClr val="black"/>
+                </a:solidFill>
+                <a:effectLst/>
+                <a:uLnTx/>
+                <a:uFillTx/>
+                <a:latin typeface="Calibri" panose="020F0502020204030204"/>
+                <a:ea typeface="+mn-ea"/>
+                <a:cs typeface="+mn-cs"/>
+              </a:rPr>
+              <a:pPr marL="0" marR="0" lvl="0" indent="0" algn="r" defTabSz="914400" rtl="0" eaLnBrk="1" fontAlgn="auto" latinLnBrk="0" hangingPunct="1">
+                <a:lnSpc>
+                  <a:spcPct val="100000"/>
+                </a:lnSpc>
+                <a:spcBef>
+                  <a:spcPts val="0"/>
+                </a:spcBef>
+                <a:spcAft>
+                  <a:spcPts val="0"/>
+                </a:spcAft>
+                <a:buClrTx/>
+                <a:buSzTx/>
+                <a:buFontTx/>
+                <a:buNone/>
+                <a:tabLst/>
+                <a:defRPr/>
+              </a:pPr>
+              <a:t>1</a:t>
             </a:fld>
-            <a:endParaRPr lang="en-US"/>
+            <a:endParaRPr kumimoji="0" lang="pt-BR" sz="1200" b="0" i="0" u="none" strike="noStrike" kern="1200" cap="none" spc="0" normalizeH="0" baseline="0" noProof="0">
+              <a:ln>
+                <a:noFill/>
+              </a:ln>
+              <a:solidFill>
+                <a:prstClr val="black"/>
+              </a:solidFill>
+              <a:effectLst/>
+              <a:uLnTx/>
+              <a:uFillTx/>
+              <a:latin typeface="Calibri" panose="020F0502020204030204"/>
+              <a:ea typeface="+mn-ea"/>
+              <a:cs typeface="+mn-cs"/>
+            </a:endParaRPr>
           </a:p>
         </p:txBody>
       </p:sp>
     </p:spTree>
     <p:extLst>
       <p:ext uri="{BB962C8B-B14F-4D97-AF65-F5344CB8AC3E}">
-        <p14:creationId xmlns:p14="http://schemas.microsoft.com/office/powerpoint/2010/main" val="2910927964"/>
+        <p14:creationId xmlns:p14="http://schemas.microsoft.com/office/powerpoint/2010/main" val="618961520"/>
       </p:ext>
     </p:extLst>
   </p:cSld>
   <p:clrMapOvr>
     <a:masterClrMapping/>
   </p:clrMapOvr>
-</p:sldLayout>
+</p:notes>
 </file>
 
-<file path=ppt/slideLayouts/slideLayout11.xml><?xml version="1.0" encoding="utf-8"?>
-<p:sldLayout xmlns:a="http://schemas.openxmlformats.org/drawingml/2006/main" xmlns:r="http://schemas.openxmlformats.org/officeDocument/2006/relationships" xmlns:p="http://schemas.openxmlformats.org/presentationml/2006/main" type="vertTitleAndTx" preserve="1">
-  <p:cSld name="Vertical Title and Text">
+<file path=ppt/slideLayouts/slideLayout1.xml><?xml version="1.0" encoding="utf-8"?>
+<p:sldLayout xmlns:a="http://schemas.openxmlformats.org/drawingml/2006/main" xmlns:r="http://schemas.openxmlformats.org/officeDocument/2006/relationships" xmlns:p="http://schemas.openxmlformats.org/presentationml/2006/main" type="title" preserve="1">
+  <p:cSld name="Slide de título">
     <p:spTree>
       <p:nvGrpSpPr>
         <p:cNvPr id="1" name=""/>
@@ -558,90 +640,104 @@
       </p:grpSpPr>
       <p:sp>
         <p:nvSpPr>
-          <p:cNvPr id="2" name="Vertical Title 1"/>
+          <p:cNvPr id="2" name="Título 1"/>
           <p:cNvSpPr>
             <a:spLocks noGrp="1"/>
           </p:cNvSpPr>
           <p:nvPr>
-            <p:ph type="title" orient="vert"/>
+            <p:ph type="ctrTitle"/>
           </p:nvPr>
         </p:nvSpPr>
         <p:spPr>
           <a:xfrm>
-            <a:off x="6629400" y="274638"/>
-            <a:ext cx="2057400" cy="5851525"/>
+            <a:off x="1524000" y="1122363"/>
+            <a:ext cx="9144000" cy="2387600"/>
           </a:xfrm>
         </p:spPr>
         <p:txBody>
-          <a:bodyPr vert="eaVert"/>
-          <a:lstStyle/>
-          <a:p>
-            <a:r>
-              <a:rPr lang="en-US"/>
-              <a:t>Click to edit Master title style</a:t>
-            </a:r>
+          <a:bodyPr anchor="b"/>
+          <a:lstStyle>
+            <a:lvl1pPr algn="ctr">
+              <a:defRPr sz="6000"/>
+            </a:lvl1pPr>
+          </a:lstStyle>
+          <a:p>
+            <a:r>
+              <a:rPr lang="pt-BR"/>
+              <a:t>Clique para editar o título mestre</a:t>
+            </a:r>
+            <a:endParaRPr lang="de-DE"/>
           </a:p>
         </p:txBody>
       </p:sp>
       <p:sp>
         <p:nvSpPr>
-          <p:cNvPr id="3" name="Vertical Text Placeholder 2"/>
+          <p:cNvPr id="3" name="Subtítulo 2"/>
           <p:cNvSpPr>
             <a:spLocks noGrp="1"/>
           </p:cNvSpPr>
           <p:nvPr>
-            <p:ph type="body" orient="vert" idx="1"/>
+            <p:ph type="subTitle" idx="1"/>
           </p:nvPr>
         </p:nvSpPr>
         <p:spPr>
           <a:xfrm>
-            <a:off x="457200" y="274638"/>
-            <a:ext cx="6019800" cy="5851525"/>
+            <a:off x="1524000" y="3602038"/>
+            <a:ext cx="9144000" cy="1655762"/>
           </a:xfrm>
         </p:spPr>
         <p:txBody>
-          <a:bodyPr vert="eaVert"/>
-          <a:lstStyle/>
-          <a:p>
-            <a:pPr lvl="0"/>
-            <a:r>
-              <a:rPr lang="en-US"/>
-              <a:t>Click to edit Master text styles</a:t>
-            </a:r>
-          </a:p>
-          <a:p>
-            <a:pPr lvl="1"/>
-            <a:r>
-              <a:rPr lang="en-US"/>
-              <a:t>Second level</a:t>
-            </a:r>
-          </a:p>
-          <a:p>
-            <a:pPr lvl="2"/>
-            <a:r>
-              <a:rPr lang="en-US"/>
-              <a:t>Third level</a:t>
-            </a:r>
-          </a:p>
-          <a:p>
-            <a:pPr lvl="3"/>
-            <a:r>
-              <a:rPr lang="en-US"/>
-              <a:t>Fourth level</a:t>
-            </a:r>
-          </a:p>
-          <a:p>
-            <a:pPr lvl="4"/>
-            <a:r>
-              <a:rPr lang="en-US"/>
-              <a:t>Fifth level</a:t>
-            </a:r>
+          <a:bodyPr/>
+          <a:lstStyle>
+            <a:lvl1pPr marL="0" indent="0" algn="ctr">
+              <a:buNone/>
+              <a:defRPr sz="2400"/>
+            </a:lvl1pPr>
+            <a:lvl2pPr marL="457200" indent="0" algn="ctr">
+              <a:buNone/>
+              <a:defRPr sz="2000"/>
+            </a:lvl2pPr>
+            <a:lvl3pPr marL="914400" indent="0" algn="ctr">
+              <a:buNone/>
+              <a:defRPr sz="1800"/>
+            </a:lvl3pPr>
+            <a:lvl4pPr marL="1371600" indent="0" algn="ctr">
+              <a:buNone/>
+              <a:defRPr sz="1600"/>
+            </a:lvl4pPr>
+            <a:lvl5pPr marL="1828800" indent="0" algn="ctr">
+              <a:buNone/>
+              <a:defRPr sz="1600"/>
+            </a:lvl5pPr>
+            <a:lvl6pPr marL="2286000" indent="0" algn="ctr">
+              <a:buNone/>
+              <a:defRPr sz="1600"/>
+            </a:lvl6pPr>
+            <a:lvl7pPr marL="2743200" indent="0" algn="ctr">
+              <a:buNone/>
+              <a:defRPr sz="1600"/>
+            </a:lvl7pPr>
+            <a:lvl8pPr marL="3200400" indent="0" algn="ctr">
+              <a:buNone/>
+              <a:defRPr sz="1600"/>
+            </a:lvl8pPr>
+            <a:lvl9pPr marL="3657600" indent="0" algn="ctr">
+              <a:buNone/>
+              <a:defRPr sz="1600"/>
+            </a:lvl9pPr>
+          </a:lstStyle>
+          <a:p>
+            <a:r>
+              <a:rPr lang="pt-BR"/>
+              <a:t>Clique para editar o estilo do subtítulo mestre</a:t>
+            </a:r>
+            <a:endParaRPr lang="de-DE"/>
           </a:p>
         </p:txBody>
       </p:sp>
       <p:sp>
         <p:nvSpPr>
-          <p:cNvPr id="4" name="Date Placeholder 3"/>
+          <p:cNvPr id="4" name="Espaço Reservado para Data 3"/>
           <p:cNvSpPr>
             <a:spLocks noGrp="1"/>
           </p:cNvSpPr>
@@ -654,17 +750,17 @@
           <a:bodyPr/>
           <a:lstStyle/>
           <a:p>
-            <a:fld id="{5BCAD085-E8A6-8845-BD4E-CB4CCA059FC4}" type="datetimeFigureOut">
-              <a:rPr lang="en-US" smtClean="0"/>
-              <a:t>5/19/2026</a:t>
+            <a:fld id="{F0E51C7C-CEA3-4CAA-BE4B-344879E7C377}" type="datetimeFigureOut">
+              <a:rPr lang="de-DE" smtClean="0"/>
+              <a:t>29.05.2026</a:t>
             </a:fld>
-            <a:endParaRPr lang="en-US"/>
+            <a:endParaRPr lang="de-DE"/>
           </a:p>
         </p:txBody>
       </p:sp>
       <p:sp>
         <p:nvSpPr>
-          <p:cNvPr id="5" name="Footer Placeholder 4"/>
+          <p:cNvPr id="5" name="Espaço Reservado para Rodapé 4"/>
           <p:cNvSpPr>
             <a:spLocks noGrp="1"/>
           </p:cNvSpPr>
@@ -677,13 +773,13 @@
           <a:bodyPr/>
           <a:lstStyle/>
           <a:p>
-            <a:endParaRPr lang="en-US"/>
+            <a:endParaRPr lang="de-DE"/>
           </a:p>
         </p:txBody>
       </p:sp>
       <p:sp>
         <p:nvSpPr>
-          <p:cNvPr id="6" name="Slide Number Placeholder 5"/>
+          <p:cNvPr id="6" name="Espaço Reservado para Número de Slide 5"/>
           <p:cNvSpPr>
             <a:spLocks noGrp="1"/>
           </p:cNvSpPr>
@@ -696,18 +792,18 @@
           <a:bodyPr/>
           <a:lstStyle/>
           <a:p>
-            <a:fld id="{C1FF6DA9-008F-8B48-92A6-B652298478BF}" type="slidenum">
-              <a:rPr lang="en-US" smtClean="0"/>
+            <a:fld id="{754FE2FE-B55E-4328-8F5C-2CEB8781A47B}" type="slidenum">
+              <a:rPr lang="de-DE" smtClean="0"/>
               <a:t>‹nº›</a:t>
             </a:fld>
-            <a:endParaRPr lang="en-US"/>
+            <a:endParaRPr lang="de-DE"/>
           </a:p>
         </p:txBody>
       </p:sp>
     </p:spTree>
     <p:extLst>
       <p:ext uri="{BB962C8B-B14F-4D97-AF65-F5344CB8AC3E}">
-        <p14:creationId xmlns:p14="http://schemas.microsoft.com/office/powerpoint/2010/main" val="3612223792"/>
+        <p14:creationId xmlns:p14="http://schemas.microsoft.com/office/powerpoint/2010/main" val="877683876"/>
       </p:ext>
     </p:extLst>
   </p:cSld>
@@ -717,9 +813,9 @@
 </p:sldLayout>
 </file>
 
-<file path=ppt/slideLayouts/slideLayout2.xml><?xml version="1.0" encoding="utf-8"?>
-<p:sldLayout xmlns:a="http://schemas.openxmlformats.org/drawingml/2006/main" xmlns:r="http://schemas.openxmlformats.org/officeDocument/2006/relationships" xmlns:p="http://schemas.openxmlformats.org/presentationml/2006/main" type="obj" preserve="1">
-  <p:cSld name="Title and Content">
+<file path=ppt/slideLayouts/slideLayout10.xml><?xml version="1.0" encoding="utf-8"?>
+<p:sldLayout xmlns:a="http://schemas.openxmlformats.org/drawingml/2006/main" xmlns:r="http://schemas.openxmlformats.org/officeDocument/2006/relationships" xmlns:p="http://schemas.openxmlformats.org/presentationml/2006/main" type="vertTx" preserve="1">
+  <p:cSld name="Título e texto vertical">
     <p:spTree>
       <p:nvGrpSpPr>
         <p:cNvPr id="1" name=""/>
@@ -736,7 +832,7 @@
       </p:grpSpPr>
       <p:sp>
         <p:nvSpPr>
-          <p:cNvPr id="2" name="Title 1"/>
+          <p:cNvPr id="2" name="Título 1"/>
           <p:cNvSpPr>
             <a:spLocks noGrp="1"/>
           </p:cNvSpPr>
@@ -750,66 +846,68 @@
           <a:lstStyle/>
           <a:p>
             <a:r>
-              <a:rPr lang="en-US"/>
-              <a:t>Click to edit Master title style</a:t>
-            </a:r>
+              <a:rPr lang="pt-BR"/>
+              <a:t>Clique para editar o título mestre</a:t>
+            </a:r>
+            <a:endParaRPr lang="de-DE"/>
           </a:p>
         </p:txBody>
       </p:sp>
       <p:sp>
         <p:nvSpPr>
-          <p:cNvPr id="3" name="Content Placeholder 2"/>
+          <p:cNvPr id="3" name="Espaço Reservado para Texto Vertical 2"/>
           <p:cNvSpPr>
             <a:spLocks noGrp="1"/>
           </p:cNvSpPr>
           <p:nvPr>
-            <p:ph idx="1"/>
+            <p:ph type="body" orient="vert" idx="1"/>
           </p:nvPr>
         </p:nvSpPr>
         <p:spPr/>
         <p:txBody>
-          <a:bodyPr/>
+          <a:bodyPr vert="eaVert"/>
           <a:lstStyle/>
           <a:p>
             <a:pPr lvl="0"/>
             <a:r>
-              <a:rPr lang="en-US"/>
-              <a:t>Click to edit Master text styles</a:t>
+              <a:rPr lang="pt-BR"/>
+              <a:t>Clique para editar o texto mestre</a:t>
             </a:r>
           </a:p>
           <a:p>
             <a:pPr lvl="1"/>
             <a:r>
-              <a:rPr lang="en-US"/>
-              <a:t>Second level</a:t>
+              <a:rPr lang="pt-BR"/>
+              <a:t>Segundo nível</a:t>
             </a:r>
           </a:p>
           <a:p>
             <a:pPr lvl="2"/>
             <a:r>
-              <a:rPr lang="en-US"/>
-              <a:t>Third level</a:t>
+              <a:rPr lang="pt-BR"/>
+              <a:t>Terceiro nível</a:t>
             </a:r>
           </a:p>
           <a:p>
             <a:pPr lvl="3"/>
             <a:r>
-              <a:rPr lang="en-US"/>
-              <a:t>Fourth level</a:t>
+              <a:rPr lang="pt-BR"/>
+              <a:t>Quarto nível</a:t>
             </a:r>
           </a:p>
           <a:p>
             <a:pPr lvl="4"/>
             <a:r>
-              <a:rPr lang="en-US"/>
-              <a:t>Fifth level</a:t>
-            </a:r>
+              <a:rPr lang="pt-BR"/>
+              <a:t>Quinto nível</a:t>
+            </a:r>
+            <a:endParaRPr lang="de-DE"/>
           </a:p>
         </p:txBody>
       </p:sp>
       <p:sp>
         <p:nvSpPr>
-          <p:cNvPr id="4" name="Date Placeholder 3"/>
+          <p:cNvPr id="4" name="Espaço Reservado para Data 3"/>
           <p:cNvSpPr>
             <a:spLocks noGrp="1"/>
           </p:cNvSpPr>
@@ -822,17 +920,17 @@
           <a:bodyPr/>
           <a:lstStyle/>
           <a:p>
-            <a:fld id="{5BCAD085-E8A6-8845-BD4E-CB4CCA059FC4}" type="datetimeFigureOut">
-              <a:rPr lang="en-US" smtClean="0"/>
-              <a:t>5/19/2026</a:t>
+            <a:fld id="{F0E51C7C-CEA3-4CAA-BE4B-344879E7C377}" type="datetimeFigureOut">
+              <a:rPr lang="de-DE" smtClean="0"/>
+              <a:t>29.05.2026</a:t>
             </a:fld>
-            <a:endParaRPr lang="en-US"/>
+            <a:endParaRPr lang="de-DE"/>
           </a:p>
         </p:txBody>
       </p:sp>
       <p:sp>
         <p:nvSpPr>
-          <p:cNvPr id="5" name="Footer Placeholder 4"/>
+          <p:cNvPr id="5" name="Espaço Reservado para Rodapé 4"/>
           <p:cNvSpPr>
             <a:spLocks noGrp="1"/>
           </p:cNvSpPr>
@@ -845,13 +943,13 @@
           <a:bodyPr/>
           <a:lstStyle/>
           <a:p>
-            <a:endParaRPr lang="en-US"/>
+            <a:endParaRPr lang="de-DE"/>
           </a:p>
         </p:txBody>
       </p:sp>
       <p:sp>
         <p:nvSpPr>
-          <p:cNvPr id="6" name="Slide Number Placeholder 5"/>
+          <p:cNvPr id="6" name="Espaço Reservado para Número de Slide 5"/>
           <p:cNvSpPr>
             <a:spLocks noGrp="1"/>
           </p:cNvSpPr>
@@ -864,18 +962,18 @@
           <a:bodyPr/>
           <a:lstStyle/>
           <a:p>
-            <a:fld id="{C1FF6DA9-008F-8B48-92A6-B652298478BF}" type="slidenum">
-              <a:rPr lang="en-US" smtClean="0"/>
+            <a:fld id="{754FE2FE-B55E-4328-8F5C-2CEB8781A47B}" type="slidenum">
+              <a:rPr lang="de-DE" smtClean="0"/>
               <a:t>‹nº›</a:t>
             </a:fld>
-            <a:endParaRPr lang="en-US"/>
+            <a:endParaRPr lang="de-DE"/>
           </a:p>
         </p:txBody>
       </p:sp>
     </p:spTree>
     <p:extLst>
       <p:ext uri="{BB962C8B-B14F-4D97-AF65-F5344CB8AC3E}">
-        <p14:creationId xmlns:p14="http://schemas.microsoft.com/office/powerpoint/2010/main" val="2614314258"/>
+        <p14:creationId xmlns:p14="http://schemas.microsoft.com/office/powerpoint/2010/main" val="746588027"/>
       </p:ext>
     </p:extLst>
   </p:cSld>
@@ -885,9 +983,9 @@
 </p:sldLayout>
 </file>
 
-<file path=ppt/slideLayouts/slideLayout3.xml><?xml version="1.0" encoding="utf-8"?>
-<p:sldLayout xmlns:a="http://schemas.openxmlformats.org/drawingml/2006/main" xmlns:r="http://schemas.openxmlformats.org/officeDocument/2006/relationships" xmlns:p="http://schemas.openxmlformats.org/presentationml/2006/main" type="secHead" preserve="1">
-  <p:cSld name="Section Header">
+<file path=ppt/slideLayouts/slideLayout11.xml><?xml version="1.0" encoding="utf-8"?>
+<p:sldLayout xmlns:a="http://schemas.openxmlformats.org/drawingml/2006/main" xmlns:r="http://schemas.openxmlformats.org/officeDocument/2006/relationships" xmlns:p="http://schemas.openxmlformats.org/presentationml/2006/main" type="vertTitleAndTx" preserve="1">
+  <p:cSld name="Título e texto verticais">
     <p:spTree>
       <p:nvGrpSpPr>
         <p:cNvPr id="1" name=""/>
@@ -904,157 +1002,92 @@
       </p:grpSpPr>
       <p:sp>
         <p:nvSpPr>
-          <p:cNvPr id="2" name="Title 1"/>
+          <p:cNvPr id="2" name="Título Vertical 1"/>
           <p:cNvSpPr>
             <a:spLocks noGrp="1"/>
           </p:cNvSpPr>
           <p:nvPr>
-            <p:ph type="title"/>
+            <p:ph type="title" orient="vert"/>
           </p:nvPr>
         </p:nvSpPr>
         <p:spPr>
           <a:xfrm>
-            <a:off x="722313" y="4406900"/>
-            <a:ext cx="7772400" cy="1362075"/>
+            <a:off x="8724900" y="365125"/>
+            <a:ext cx="2628900" cy="5811838"/>
           </a:xfrm>
         </p:spPr>
         <p:txBody>
-          <a:bodyPr anchor="t"/>
-          <a:lstStyle>
-            <a:lvl1pPr algn="l">
-              <a:defRPr sz="4000" b="1" cap="all"/>
-            </a:lvl1pPr>
-          </a:lstStyle>
-          <a:p>
-            <a:r>
-              <a:rPr lang="en-US"/>
-              <a:t>Click to edit Master title style</a:t>
-            </a:r>
+          <a:bodyPr vert="eaVert"/>
+          <a:lstStyle/>
+          <a:p>
+            <a:r>
+              <a:rPr lang="pt-BR"/>
+              <a:t>Clique para editar o título mestre</a:t>
+            </a:r>
+            <a:endParaRPr lang="de-DE"/>
           </a:p>
         </p:txBody>
       </p:sp>
       <p:sp>
         <p:nvSpPr>
-          <p:cNvPr id="3" name="Text Placeholder 2"/>
+          <p:cNvPr id="3" name="Espaço Reservado para Texto Vertical 2"/>
           <p:cNvSpPr>
             <a:spLocks noGrp="1"/>
           </p:cNvSpPr>
           <p:nvPr>
-            <p:ph type="body" idx="1"/>
+            <p:ph type="body" orient="vert" idx="1"/>
           </p:nvPr>
         </p:nvSpPr>
         <p:spPr>
           <a:xfrm>
-            <a:off x="722313" y="2906713"/>
-            <a:ext cx="7772400" cy="1500187"/>
+            <a:off x="838200" y="365125"/>
+            <a:ext cx="7734300" cy="5811838"/>
           </a:xfrm>
         </p:spPr>
         <p:txBody>
-          <a:bodyPr anchor="b"/>
-          <a:lstStyle>
-            <a:lvl1pPr marL="0" indent="0">
-              <a:buNone/>
-              <a:defRPr sz="2000">
-                <a:solidFill>
-                  <a:schemeClr val="tx1">
-                    <a:tint val="75000"/>
-                  </a:schemeClr>
-                </a:solidFill>
-              </a:defRPr>
-            </a:lvl1pPr>
-            <a:lvl2pPr marL="457200" indent="0">
-              <a:buNone/>
-              <a:defRPr sz="1800">
-                <a:solidFill>
-                  <a:schemeClr val="tx1">
-                    <a:tint val="75000"/>
-                  </a:schemeClr>
-                </a:solidFill>
-              </a:defRPr>
-            </a:lvl2pPr>
-            <a:lvl3pPr marL="914400" indent="0">
-              <a:buNone/>
-              <a:defRPr sz="1600">
-                <a:solidFill>
-                  <a:schemeClr val="tx1">
-                    <a:tint val="75000"/>
-                  </a:schemeClr>
-                </a:solidFill>
-              </a:defRPr>
-            </a:lvl3pPr>
-            <a:lvl4pPr marL="1371600" indent="0">
-              <a:buNone/>
-              <a:defRPr sz="1400">
-                <a:solidFill>
-                  <a:schemeClr val="tx1">
-                    <a:tint val="75000"/>
-                  </a:schemeClr>
-                </a:solidFill>
-              </a:defRPr>
-            </a:lvl4pPr>
-            <a:lvl5pPr marL="1828800" indent="0">
-              <a:buNone/>
-              <a:defRPr sz="1400">
-                <a:solidFill>
-                  <a:schemeClr val="tx1">
-                    <a:tint val="75000"/>
-                  </a:schemeClr>
-                </a:solidFill>
-              </a:defRPr>
-            </a:lvl5pPr>
-            <a:lvl6pPr marL="2286000" indent="0">
-              <a:buNone/>
-              <a:defRPr sz="1400">
-                <a:solidFill>
-                  <a:schemeClr val="tx1">
-                    <a:tint val="75000"/>
-                  </a:schemeClr>
-                </a:solidFill>
-              </a:defRPr>
-            </a:lvl6pPr>
-            <a:lvl7pPr marL="2743200" indent="0">
-              <a:buNone/>
-              <a:defRPr sz="1400">
-                <a:solidFill>
-                  <a:schemeClr val="tx1">
-                    <a:tint val="75000"/>
-                  </a:schemeClr>
-                </a:solidFill>
-              </a:defRPr>
-            </a:lvl7pPr>
-            <a:lvl8pPr marL="3200400" indent="0">
-              <a:buNone/>
-              <a:defRPr sz="1400">
-                <a:solidFill>
-                  <a:schemeClr val="tx1">
-                    <a:tint val="75000"/>
-                  </a:schemeClr>
-                </a:solidFill>
-              </a:defRPr>
-            </a:lvl8pPr>
-            <a:lvl9pPr marL="3657600" indent="0">
-              <a:buNone/>
-              <a:defRPr sz="1400">
-                <a:solidFill>
-                  <a:schemeClr val="tx1">
-                    <a:tint val="75000"/>
-                  </a:schemeClr>
-                </a:solidFill>
-              </a:defRPr>
-            </a:lvl9pPr>
-          </a:lstStyle>
+          <a:bodyPr vert="eaVert"/>
+          <a:lstStyle/>
           <a:p>
             <a:pPr lvl="0"/>
             <a:r>
-              <a:rPr lang="en-US"/>
-              <a:t>Click to edit Master text styles</a:t>
-            </a:r>
+              <a:rPr lang="pt-BR"/>
+              <a:t>Clique para editar o texto mestre</a:t>
+            </a:r>
+          </a:p>
+          <a:p>
+            <a:pPr lvl="1"/>
+            <a:r>
+              <a:rPr lang="pt-BR"/>
+              <a:t>Segundo nível</a:t>
+            </a:r>
+          </a:p>
+          <a:p>
+            <a:pPr lvl="2"/>
+            <a:r>
+              <a:rPr lang="pt-BR"/>
+              <a:t>Terceiro nível</a:t>
+            </a:r>
+          </a:p>
+          <a:p>
+            <a:pPr lvl="3"/>
+            <a:r>
+              <a:rPr lang="pt-BR"/>
+              <a:t>Quarto nível</a:t>
+            </a:r>
+          </a:p>
+          <a:p>
+            <a:pPr lvl="4"/>
+            <a:r>
+              <a:rPr lang="pt-BR"/>
+              <a:t>Quinto nível</a:t>
+            </a:r>
+            <a:endParaRPr lang="de-DE"/>
           </a:p>
         </p:txBody>
       </p:sp>
       <p:sp>
         <p:nvSpPr>
-          <p:cNvPr id="4" name="Date Placeholder 3"/>
+          <p:cNvPr id="4" name="Espaço Reservado para Data 3"/>
           <p:cNvSpPr>
             <a:spLocks noGrp="1"/>
           </p:cNvSpPr>
@@ -1067,17 +1100,17 @@
           <a:bodyPr/>
           <a:lstStyle/>
           <a:p>
-            <a:fld id="{5BCAD085-E8A6-8845-BD4E-CB4CCA059FC4}" type="datetimeFigureOut">
-              <a:rPr lang="en-US" smtClean="0"/>
-              <a:t>5/19/2026</a:t>
+            <a:fld id="{F0E51C7C-CEA3-4CAA-BE4B-344879E7C377}" type="datetimeFigureOut">
+              <a:rPr lang="de-DE" smtClean="0"/>
+              <a:t>29.05.2026</a:t>
             </a:fld>
-            <a:endParaRPr lang="en-US"/>
+            <a:endParaRPr lang="de-DE"/>
           </a:p>
         </p:txBody>
       </p:sp>
       <p:sp>
         <p:nvSpPr>
-          <p:cNvPr id="5" name="Footer Placeholder 4"/>
+          <p:cNvPr id="5" name="Espaço Reservado para Rodapé 4"/>
           <p:cNvSpPr>
             <a:spLocks noGrp="1"/>
           </p:cNvSpPr>
@@ -1090,13 +1123,13 @@
           <a:bodyPr/>
           <a:lstStyle/>
           <a:p>
-            <a:endParaRPr lang="en-US"/>
+            <a:endParaRPr lang="de-DE"/>
           </a:p>
         </p:txBody>
       </p:sp>
       <p:sp>
         <p:nvSpPr>
-          <p:cNvPr id="6" name="Slide Number Placeholder 5"/>
+          <p:cNvPr id="6" name="Espaço Reservado para Número de Slide 5"/>
           <p:cNvSpPr>
             <a:spLocks noGrp="1"/>
           </p:cNvSpPr>
@@ -1109,18 +1142,18 @@
           <a:bodyPr/>
           <a:lstStyle/>
           <a:p>
-            <a:fld id="{C1FF6DA9-008F-8B48-92A6-B652298478BF}" type="slidenum">
-              <a:rPr lang="en-US" smtClean="0"/>
+            <a:fld id="{754FE2FE-B55E-4328-8F5C-2CEB8781A47B}" type="slidenum">
+              <a:rPr lang="de-DE" smtClean="0"/>
               <a:t>‹nº›</a:t>
             </a:fld>
-            <a:endParaRPr lang="en-US"/>
+            <a:endParaRPr lang="de-DE"/>
           </a:p>
         </p:txBody>
       </p:sp>
     </p:spTree>
     <p:extLst>
       <p:ext uri="{BB962C8B-B14F-4D97-AF65-F5344CB8AC3E}">
-        <p14:creationId xmlns:p14="http://schemas.microsoft.com/office/powerpoint/2010/main" val="960648375"/>
+        <p14:creationId xmlns:p14="http://schemas.microsoft.com/office/powerpoint/2010/main" val="1306397509"/>
       </p:ext>
     </p:extLst>
   </p:cSld>
@@ -1130,9 +1163,9 @@
 </p:sldLayout>
 </file>
 
-<file path=ppt/slideLayouts/slideLayout4.xml><?xml version="1.0" encoding="utf-8"?>
-<p:sldLayout xmlns:a="http://schemas.openxmlformats.org/drawingml/2006/main" xmlns:r="http://schemas.openxmlformats.org/officeDocument/2006/relationships" xmlns:p="http://schemas.openxmlformats.org/presentationml/2006/main" type="twoObj" preserve="1">
-  <p:cSld name="Two Content">
+<file path=ppt/slideLayouts/slideLayout2.xml><?xml version="1.0" encoding="utf-8"?>
+<p:sldLayout xmlns:a="http://schemas.openxmlformats.org/drawingml/2006/main" xmlns:r="http://schemas.openxmlformats.org/officeDocument/2006/relationships" xmlns:p="http://schemas.openxmlformats.org/presentationml/2006/main" type="obj" preserve="1">
+  <p:cSld name="Título e conteúdo">
     <p:spTree>
       <p:nvGrpSpPr>
         <p:cNvPr id="1" name=""/>
@@ -1149,7 +1182,7 @@
       </p:grpSpPr>
       <p:sp>
         <p:nvSpPr>
-          <p:cNvPr id="2" name="Title 1"/>
+          <p:cNvPr id="2" name="Título 1"/>
           <p:cNvSpPr>
             <a:spLocks noGrp="1"/>
           </p:cNvSpPr>
@@ -1163,183 +1196,68 @@
           <a:lstStyle/>
           <a:p>
             <a:r>
-              <a:rPr lang="en-US"/>
-              <a:t>Click to edit Master title style</a:t>
-            </a:r>
+              <a:rPr lang="pt-BR"/>
+              <a:t>Clique para editar o título mestre</a:t>
+            </a:r>
+            <a:endParaRPr lang="de-DE"/>
           </a:p>
         </p:txBody>
       </p:sp>
       <p:sp>
         <p:nvSpPr>
-          <p:cNvPr id="3" name="Content Placeholder 2"/>
+          <p:cNvPr id="3" name="Espaço Reservado para Conteúdo 2"/>
           <p:cNvSpPr>
             <a:spLocks noGrp="1"/>
           </p:cNvSpPr>
           <p:nvPr>
-            <p:ph sz="half" idx="1"/>
+            <p:ph idx="1"/>
           </p:nvPr>
         </p:nvSpPr>
-        <p:spPr>
-          <a:xfrm>
-            <a:off x="457200" y="1600200"/>
-            <a:ext cx="4038600" cy="4525963"/>
-          </a:xfrm>
-        </p:spPr>
+        <p:spPr/>
         <p:txBody>
           <a:bodyPr/>
-          <a:lstStyle>
-            <a:lvl1pPr>
-              <a:defRPr sz="2800"/>
-            </a:lvl1pPr>
-            <a:lvl2pPr>
-              <a:defRPr sz="2400"/>
-            </a:lvl2pPr>
-            <a:lvl3pPr>
-              <a:defRPr sz="2000"/>
-            </a:lvl3pPr>
-            <a:lvl4pPr>
-              <a:defRPr sz="1800"/>
-            </a:lvl4pPr>
-            <a:lvl5pPr>
-              <a:defRPr sz="1800"/>
-            </a:lvl5pPr>
-            <a:lvl6pPr>
-              <a:defRPr sz="1800"/>
-            </a:lvl6pPr>
-            <a:lvl7pPr>
-              <a:defRPr sz="1800"/>
-            </a:lvl7pPr>
-            <a:lvl8pPr>
-              <a:defRPr sz="1800"/>
-            </a:lvl8pPr>
-            <a:lvl9pPr>
-              <a:defRPr sz="1800"/>
-            </a:lvl9pPr>
-          </a:lstStyle>
+          <a:lstStyle/>
           <a:p>
             <a:pPr lvl="0"/>
             <a:r>
-              <a:rPr lang="en-US"/>
-              <a:t>Click to edit Master text styles</a:t>
+              <a:rPr lang="pt-BR"/>
+              <a:t>Clique para editar o texto mestre</a:t>
             </a:r>
           </a:p>
           <a:p>
             <a:pPr lvl="1"/>
             <a:r>
-              <a:rPr lang="en-US"/>
-              <a:t>Second level</a:t>
+              <a:rPr lang="pt-BR"/>
+              <a:t>Segundo nível</a:t>
             </a:r>
           </a:p>
           <a:p>
             <a:pPr lvl="2"/>
             <a:r>
-              <a:rPr lang="en-US"/>
-              <a:t>Third level</a:t>
+              <a:rPr lang="pt-BR"/>
+              <a:t>Terceiro nível</a:t>
             </a:r>
           </a:p>
           <a:p>
             <a:pPr lvl="3"/>
             <a:r>
-              <a:rPr lang="en-US"/>
-              <a:t>Fourth level</a:t>
+              <a:rPr lang="pt-BR"/>
+              <a:t>Quarto nível</a:t>
             </a:r>
           </a:p>
           <a:p>
             <a:pPr lvl="4"/>
             <a:r>
-              <a:rPr lang="en-US"/>
-              <a:t>Fifth level</a:t>
-            </a:r>
+              <a:rPr lang="pt-BR"/>
+              <a:t>Quinto nível</a:t>
+            </a:r>
+            <a:endParaRPr lang="de-DE"/>
           </a:p>
         </p:txBody>
       </p:sp>
       <p:sp>
         <p:nvSpPr>
-          <p:cNvPr id="4" name="Content Placeholder 3"/>
-          <p:cNvSpPr>
-            <a:spLocks noGrp="1"/>
-          </p:cNvSpPr>
-          <p:nvPr>
-            <p:ph sz="half" idx="2"/>
-          </p:nvPr>
-        </p:nvSpPr>
-        <p:spPr>
-          <a:xfrm>
-            <a:off x="4648200" y="1600200"/>
-            <a:ext cx="4038600" cy="4525963"/>
-          </a:xfrm>
-        </p:spPr>
-        <p:txBody>
-          <a:bodyPr/>
-          <a:lstStyle>
-            <a:lvl1pPr>
-              <a:defRPr sz="2800"/>
-            </a:lvl1pPr>
-            <a:lvl2pPr>
-              <a:defRPr sz="2400"/>
-            </a:lvl2pPr>
-            <a:lvl3pPr>
-              <a:defRPr sz="2000"/>
-            </a:lvl3pPr>
-            <a:lvl4pPr>
-              <a:defRPr sz="1800"/>
-            </a:lvl4pPr>
-            <a:lvl5pPr>
-              <a:defRPr sz="1800"/>
-            </a:lvl5pPr>
-            <a:lvl6pPr>
-              <a:defRPr sz="1800"/>
-            </a:lvl6pPr>
-            <a:lvl7pPr>
-              <a:defRPr sz="1800"/>
-            </a:lvl7pPr>
-            <a:lvl8pPr>
-              <a:defRPr sz="1800"/>
-            </a:lvl8pPr>
-            <a:lvl9pPr>
-              <a:defRPr sz="1800"/>
-            </a:lvl9pPr>
-          </a:lstStyle>
-          <a:p>
-            <a:pPr lvl="0"/>
-            <a:r>
-              <a:rPr lang="en-US"/>
-              <a:t>Click to edit Master text styles</a:t>
-            </a:r>
-          </a:p>
-          <a:p>
-            <a:pPr lvl="1"/>
-            <a:r>
-              <a:rPr lang="en-US"/>
-              <a:t>Second level</a:t>
-            </a:r>
-          </a:p>
-          <a:p>
-            <a:pPr lvl="2"/>
-            <a:r>
-              <a:rPr lang="en-US"/>
-              <a:t>Third level</a:t>
-            </a:r>
-          </a:p>
-          <a:p>
-            <a:pPr lvl="3"/>
-            <a:r>
-              <a:rPr lang="en-US"/>
-              <a:t>Fourth level</a:t>
-            </a:r>
-          </a:p>
-          <a:p>
-            <a:pPr lvl="4"/>
-            <a:r>
-              <a:rPr lang="en-US"/>
-              <a:t>Fifth level</a:t>
-            </a:r>
-          </a:p>
-        </p:txBody>
-      </p:sp>
-      <p:sp>
-        <p:nvSpPr>
-          <p:cNvPr id="5" name="Date Placeholder 4"/>
+          <p:cNvPr id="4" name="Espaço Reservado para Data 3"/>
           <p:cNvSpPr>
             <a:spLocks noGrp="1"/>
           </p:cNvSpPr>
@@ -1352,17 +1270,17 @@
           <a:bodyPr/>
           <a:lstStyle/>
           <a:p>
-            <a:fld id="{5BCAD085-E8A6-8845-BD4E-CB4CCA059FC4}" type="datetimeFigureOut">
-              <a:rPr lang="en-US" smtClean="0"/>
-              <a:t>5/19/2026</a:t>
+            <a:fld id="{F0E51C7C-CEA3-4CAA-BE4B-344879E7C377}" type="datetimeFigureOut">
+              <a:rPr lang="de-DE" smtClean="0"/>
+              <a:t>29.05.2026</a:t>
             </a:fld>
-            <a:endParaRPr lang="en-US"/>
+            <a:endParaRPr lang="de-DE"/>
           </a:p>
         </p:txBody>
       </p:sp>
       <p:sp>
         <p:nvSpPr>
-          <p:cNvPr id="6" name="Footer Placeholder 5"/>
+          <p:cNvPr id="5" name="Espaço Reservado para Rodapé 4"/>
           <p:cNvSpPr>
             <a:spLocks noGrp="1"/>
           </p:cNvSpPr>
@@ -1375,13 +1293,13 @@
           <a:bodyPr/>
           <a:lstStyle/>
           <a:p>
-            <a:endParaRPr lang="en-US"/>
+            <a:endParaRPr lang="de-DE"/>
           </a:p>
         </p:txBody>
       </p:sp>
       <p:sp>
         <p:nvSpPr>
-          <p:cNvPr id="7" name="Slide Number Placeholder 6"/>
+          <p:cNvPr id="6" name="Espaço Reservado para Número de Slide 5"/>
           <p:cNvSpPr>
             <a:spLocks noGrp="1"/>
           </p:cNvSpPr>
@@ -1394,18 +1312,18 @@
           <a:bodyPr/>
           <a:lstStyle/>
           <a:p>
-            <a:fld id="{C1FF6DA9-008F-8B48-92A6-B652298478BF}" type="slidenum">
-              <a:rPr lang="en-US" smtClean="0"/>
+            <a:fld id="{754FE2FE-B55E-4328-8F5C-2CEB8781A47B}" type="slidenum">
+              <a:rPr lang="de-DE" smtClean="0"/>
               <a:t>‹nº›</a:t>
             </a:fld>
-            <a:endParaRPr lang="en-US"/>
+            <a:endParaRPr lang="de-DE"/>
           </a:p>
         </p:txBody>
       </p:sp>
     </p:spTree>
     <p:extLst>
       <p:ext uri="{BB962C8B-B14F-4D97-AF65-F5344CB8AC3E}">
-        <p14:creationId xmlns:p14="http://schemas.microsoft.com/office/powerpoint/2010/main" val="2782244947"/>
+        <p14:creationId xmlns:p14="http://schemas.microsoft.com/office/powerpoint/2010/main" val="314005268"/>
       </p:ext>
     </p:extLst>
   </p:cSld>
@@ -1415,9 +1333,9 @@
 </p:sldLayout>
 </file>
 
-<file path=ppt/slideLayouts/slideLayout5.xml><?xml version="1.0" encoding="utf-8"?>
-<p:sldLayout xmlns:a="http://schemas.openxmlformats.org/drawingml/2006/main" xmlns:r="http://schemas.openxmlformats.org/officeDocument/2006/relationships" xmlns:p="http://schemas.openxmlformats.org/presentationml/2006/main" type="twoTxTwoObj" preserve="1">
-  <p:cSld name="Comparison">
+<file path=ppt/slideLayouts/slideLayout3.xml><?xml version="1.0" encoding="utf-8"?>
+<p:sldLayout xmlns:a="http://schemas.openxmlformats.org/drawingml/2006/main" xmlns:r="http://schemas.openxmlformats.org/officeDocument/2006/relationships" xmlns:p="http://schemas.openxmlformats.org/presentationml/2006/main" type="secHead" preserve="1">
+  <p:cSld name="Cabeçalho da Seção">
     <p:spTree>
       <p:nvGrpSpPr>
         <p:cNvPr id="1" name=""/>
@@ -1434,7 +1352,253 @@
       </p:grpSpPr>
       <p:sp>
         <p:nvSpPr>
-          <p:cNvPr id="2" name="Title 1"/>
+          <p:cNvPr id="2" name="Título 1"/>
+          <p:cNvSpPr>
+            <a:spLocks noGrp="1"/>
+          </p:cNvSpPr>
+          <p:nvPr>
+            <p:ph type="title"/>
+          </p:nvPr>
+        </p:nvSpPr>
+        <p:spPr>
+          <a:xfrm>
+            <a:off x="831850" y="1709738"/>
+            <a:ext cx="10515600" cy="2852737"/>
+          </a:xfrm>
+        </p:spPr>
+        <p:txBody>
+          <a:bodyPr anchor="b"/>
+          <a:lstStyle>
+            <a:lvl1pPr>
+              <a:defRPr sz="6000"/>
+            </a:lvl1pPr>
+          </a:lstStyle>
+          <a:p>
+            <a:r>
+              <a:rPr lang="pt-BR"/>
+              <a:t>Clique para editar o título mestre</a:t>
+            </a:r>
+            <a:endParaRPr lang="de-DE"/>
+          </a:p>
+        </p:txBody>
+      </p:sp>
+      <p:sp>
+        <p:nvSpPr>
+          <p:cNvPr id="3" name="Espaço Reservado para Texto 2"/>
+          <p:cNvSpPr>
+            <a:spLocks noGrp="1"/>
+          </p:cNvSpPr>
+          <p:nvPr>
+            <p:ph type="body" idx="1"/>
+          </p:nvPr>
+        </p:nvSpPr>
+        <p:spPr>
+          <a:xfrm>
+            <a:off x="831850" y="4589463"/>
+            <a:ext cx="10515600" cy="1500187"/>
+          </a:xfrm>
+        </p:spPr>
+        <p:txBody>
+          <a:bodyPr/>
+          <a:lstStyle>
+            <a:lvl1pPr marL="0" indent="0">
+              <a:buNone/>
+              <a:defRPr sz="2400">
+                <a:solidFill>
+                  <a:schemeClr val="tx1">
+                    <a:tint val="82000"/>
+                  </a:schemeClr>
+                </a:solidFill>
+              </a:defRPr>
+            </a:lvl1pPr>
+            <a:lvl2pPr marL="457200" indent="0">
+              <a:buNone/>
+              <a:defRPr sz="2000">
+                <a:solidFill>
+                  <a:schemeClr val="tx1">
+                    <a:tint val="82000"/>
+                  </a:schemeClr>
+                </a:solidFill>
+              </a:defRPr>
+            </a:lvl2pPr>
+            <a:lvl3pPr marL="914400" indent="0">
+              <a:buNone/>
+              <a:defRPr sz="1800">
+                <a:solidFill>
+                  <a:schemeClr val="tx1">
+                    <a:tint val="82000"/>
+                  </a:schemeClr>
+                </a:solidFill>
+              </a:defRPr>
+            </a:lvl3pPr>
+            <a:lvl4pPr marL="1371600" indent="0">
+              <a:buNone/>
+              <a:defRPr sz="1600">
+                <a:solidFill>
+                  <a:schemeClr val="tx1">
+                    <a:tint val="82000"/>
+                  </a:schemeClr>
+                </a:solidFill>
+              </a:defRPr>
+            </a:lvl4pPr>
+            <a:lvl5pPr marL="1828800" indent="0">
+              <a:buNone/>
+              <a:defRPr sz="1600">
+                <a:solidFill>
+                  <a:schemeClr val="tx1">
+                    <a:tint val="82000"/>
+                  </a:schemeClr>
+                </a:solidFill>
+              </a:defRPr>
+            </a:lvl5pPr>
+            <a:lvl6pPr marL="2286000" indent="0">
+              <a:buNone/>
+              <a:defRPr sz="1600">
+                <a:solidFill>
+                  <a:schemeClr val="tx1">
+                    <a:tint val="82000"/>
+                  </a:schemeClr>
+                </a:solidFill>
+              </a:defRPr>
+            </a:lvl6pPr>
+            <a:lvl7pPr marL="2743200" indent="0">
+              <a:buNone/>
+              <a:defRPr sz="1600">
+                <a:solidFill>
+                  <a:schemeClr val="tx1">
+                    <a:tint val="82000"/>
+                  </a:schemeClr>
+                </a:solidFill>
+              </a:defRPr>
+            </a:lvl7pPr>
+            <a:lvl8pPr marL="3200400" indent="0">
+              <a:buNone/>
+              <a:defRPr sz="1600">
+                <a:solidFill>
+                  <a:schemeClr val="tx1">
+                    <a:tint val="82000"/>
+                  </a:schemeClr>
+                </a:solidFill>
+              </a:defRPr>
+            </a:lvl8pPr>
+            <a:lvl9pPr marL="3657600" indent="0">
+              <a:buNone/>
+              <a:defRPr sz="1600">
+                <a:solidFill>
+                  <a:schemeClr val="tx1">
+                    <a:tint val="82000"/>
+                  </a:schemeClr>
+                </a:solidFill>
+              </a:defRPr>
+            </a:lvl9pPr>
+          </a:lstStyle>
+          <a:p>
+            <a:pPr lvl="0"/>
+            <a:r>
+              <a:rPr lang="pt-BR"/>
+              <a:t>Clique para editar o texto mestre</a:t>
+            </a:r>
+          </a:p>
+        </p:txBody>
+      </p:sp>
+      <p:sp>
+        <p:nvSpPr>
+          <p:cNvPr id="4" name="Espaço Reservado para Data 3"/>
+          <p:cNvSpPr>
+            <a:spLocks noGrp="1"/>
+          </p:cNvSpPr>
+          <p:nvPr>
+            <p:ph type="dt" sz="half" idx="10"/>
+          </p:nvPr>
+        </p:nvSpPr>
+        <p:spPr/>
+        <p:txBody>
+          <a:bodyPr/>
+          <a:lstStyle/>
+          <a:p>
+            <a:fld id="{F0E51C7C-CEA3-4CAA-BE4B-344879E7C377}" type="datetimeFigureOut">
+              <a:rPr lang="de-DE" smtClean="0"/>
+              <a:t>29.05.2026</a:t>
+            </a:fld>
+            <a:endParaRPr lang="de-DE"/>
+          </a:p>
+        </p:txBody>
+      </p:sp>
+      <p:sp>
+        <p:nvSpPr>
+          <p:cNvPr id="5" name="Espaço Reservado para Rodapé 4"/>
+          <p:cNvSpPr>
+            <a:spLocks noGrp="1"/>
+          </p:cNvSpPr>
+          <p:nvPr>
+            <p:ph type="ftr" sz="quarter" idx="11"/>
+          </p:nvPr>
+        </p:nvSpPr>
+        <p:spPr/>
+        <p:txBody>
+          <a:bodyPr/>
+          <a:lstStyle/>
+          <a:p>
+            <a:endParaRPr lang="de-DE"/>
+          </a:p>
+        </p:txBody>
+      </p:sp>
+      <p:sp>
+        <p:nvSpPr>
+          <p:cNvPr id="6" name="Espaço Reservado para Número de Slide 5"/>
+          <p:cNvSpPr>
+            <a:spLocks noGrp="1"/>
+          </p:cNvSpPr>
+          <p:nvPr>
+            <p:ph type="sldNum" sz="quarter" idx="12"/>
+          </p:nvPr>
+        </p:nvSpPr>
+        <p:spPr/>
+        <p:txBody>
+          <a:bodyPr/>
+          <a:lstStyle/>
+          <a:p>
+            <a:fld id="{754FE2FE-B55E-4328-8F5C-2CEB8781A47B}" type="slidenum">
+              <a:rPr lang="de-DE" smtClean="0"/>
+              <a:t>‹nº›</a:t>
+            </a:fld>
+            <a:endParaRPr lang="de-DE"/>
+          </a:p>
+        </p:txBody>
+      </p:sp>
+    </p:spTree>
+    <p:extLst>
+      <p:ext uri="{BB962C8B-B14F-4D97-AF65-F5344CB8AC3E}">
+        <p14:creationId xmlns:p14="http://schemas.microsoft.com/office/powerpoint/2010/main" val="3781375764"/>
+      </p:ext>
+    </p:extLst>
+  </p:cSld>
+  <p:clrMapOvr>
+    <a:masterClrMapping/>
+  </p:clrMapOvr>
+</p:sldLayout>
+</file>
+
+<file path=ppt/slideLayouts/slideLayout4.xml><?xml version="1.0" encoding="utf-8"?>
+<p:sldLayout xmlns:a="http://schemas.openxmlformats.org/drawingml/2006/main" xmlns:r="http://schemas.openxmlformats.org/officeDocument/2006/relationships" xmlns:p="http://schemas.openxmlformats.org/presentationml/2006/main" type="twoObj" preserve="1">
+  <p:cSld name="Duas Partes de Conteúdo">
+    <p:spTree>
+      <p:nvGrpSpPr>
+        <p:cNvPr id="1" name=""/>
+        <p:cNvGrpSpPr/>
+        <p:nvPr/>
+      </p:nvGrpSpPr>
+      <p:grpSpPr>
+        <a:xfrm>
+          <a:off x="0" y="0"/>
+          <a:ext cx="0" cy="0"/>
+          <a:chOff x="0" y="0"/>
+          <a:chExt cx="0" cy="0"/>
+        </a:xfrm>
+      </p:grpSpPr>
+      <p:sp>
+        <p:nvSpPr>
+          <p:cNvPr id="2" name="Título 1"/>
           <p:cNvSpPr>
             <a:spLocks noGrp="1"/>
           </p:cNvSpPr>
@@ -1445,22 +1609,256 @@
         <p:spPr/>
         <p:txBody>
           <a:bodyPr/>
-          <a:lstStyle>
-            <a:lvl1pPr>
-              <a:defRPr/>
-            </a:lvl1pPr>
-          </a:lstStyle>
-          <a:p>
-            <a:r>
-              <a:rPr lang="en-US"/>
-              <a:t>Click to edit Master title style</a:t>
-            </a:r>
+          <a:lstStyle/>
+          <a:p>
+            <a:r>
+              <a:rPr lang="pt-BR"/>
+              <a:t>Clique para editar o título mestre</a:t>
+            </a:r>
+            <a:endParaRPr lang="de-DE"/>
           </a:p>
         </p:txBody>
       </p:sp>
       <p:sp>
         <p:nvSpPr>
-          <p:cNvPr id="3" name="Text Placeholder 2"/>
+          <p:cNvPr id="3" name="Espaço Reservado para Conteúdo 2"/>
+          <p:cNvSpPr>
+            <a:spLocks noGrp="1"/>
+          </p:cNvSpPr>
+          <p:nvPr>
+            <p:ph sz="half" idx="1"/>
+          </p:nvPr>
+        </p:nvSpPr>
+        <p:spPr>
+          <a:xfrm>
+            <a:off x="838200" y="1825625"/>
+            <a:ext cx="5181600" cy="4351338"/>
+          </a:xfrm>
+        </p:spPr>
+        <p:txBody>
+          <a:bodyPr/>
+          <a:lstStyle/>
+          <a:p>
+            <a:pPr lvl="0"/>
+            <a:r>
+              <a:rPr lang="pt-BR"/>
+              <a:t>Clique para editar o texto mestre</a:t>
+            </a:r>
+          </a:p>
+          <a:p>
+            <a:pPr lvl="1"/>
+            <a:r>
+              <a:rPr lang="pt-BR"/>
+              <a:t>Segundo nível</a:t>
+            </a:r>
+          </a:p>
+          <a:p>
+            <a:pPr lvl="2"/>
+            <a:r>
+              <a:rPr lang="pt-BR"/>
+              <a:t>Terceiro nível</a:t>
+            </a:r>
+          </a:p>
+          <a:p>
+            <a:pPr lvl="3"/>
+            <a:r>
+              <a:rPr lang="pt-BR"/>
+              <a:t>Quarto nível</a:t>
+            </a:r>
+          </a:p>
+          <a:p>
+            <a:pPr lvl="4"/>
+            <a:r>
+              <a:rPr lang="pt-BR"/>
+              <a:t>Quinto nível</a:t>
+            </a:r>
+            <a:endParaRPr lang="de-DE"/>
+          </a:p>
+        </p:txBody>
+      </p:sp>
+      <p:sp>
+        <p:nvSpPr>
+          <p:cNvPr id="4" name="Espaço Reservado para Conteúdo 3"/>
+          <p:cNvSpPr>
+            <a:spLocks noGrp="1"/>
+          </p:cNvSpPr>
+          <p:nvPr>
+            <p:ph sz="half" idx="2"/>
+          </p:nvPr>
+        </p:nvSpPr>
+        <p:spPr>
+          <a:xfrm>
+            <a:off x="6172200" y="1825625"/>
+            <a:ext cx="5181600" cy="4351338"/>
+          </a:xfrm>
+        </p:spPr>
+        <p:txBody>
+          <a:bodyPr/>
+          <a:lstStyle/>
+          <a:p>
+            <a:pPr lvl="0"/>
+            <a:r>
+              <a:rPr lang="pt-BR"/>
+              <a:t>Clique para editar o texto mestre</a:t>
+            </a:r>
+          </a:p>
+          <a:p>
+            <a:pPr lvl="1"/>
+            <a:r>
+              <a:rPr lang="pt-BR"/>
+              <a:t>Segundo nível</a:t>
+            </a:r>
+          </a:p>
+          <a:p>
+            <a:pPr lvl="2"/>
+            <a:r>
+              <a:rPr lang="pt-BR"/>
+              <a:t>Terceiro nível</a:t>
+            </a:r>
+          </a:p>
+          <a:p>
+            <a:pPr lvl="3"/>
+            <a:r>
+              <a:rPr lang="pt-BR"/>
+              <a:t>Quarto nível</a:t>
+            </a:r>
+          </a:p>
+          <a:p>
+            <a:pPr lvl="4"/>
+            <a:r>
+              <a:rPr lang="pt-BR"/>
+              <a:t>Quinto nível</a:t>
+            </a:r>
+            <a:endParaRPr lang="de-DE"/>
+          </a:p>
+        </p:txBody>
+      </p:sp>
+      <p:sp>
+        <p:nvSpPr>
+          <p:cNvPr id="5" name="Espaço Reservado para Data 4"/>
+          <p:cNvSpPr>
+            <a:spLocks noGrp="1"/>
+          </p:cNvSpPr>
+          <p:nvPr>
+            <p:ph type="dt" sz="half" idx="10"/>
+          </p:nvPr>
+        </p:nvSpPr>
+        <p:spPr/>
+        <p:txBody>
+          <a:bodyPr/>
+          <a:lstStyle/>
+          <a:p>
+            <a:fld id="{F0E51C7C-CEA3-4CAA-BE4B-344879E7C377}" type="datetimeFigureOut">
+              <a:rPr lang="de-DE" smtClean="0"/>
+              <a:t>29.05.2026</a:t>
+            </a:fld>
+            <a:endParaRPr lang="de-DE"/>
+          </a:p>
+        </p:txBody>
+      </p:sp>
+      <p:sp>
+        <p:nvSpPr>
+          <p:cNvPr id="6" name="Espaço Reservado para Rodapé 5"/>
+          <p:cNvSpPr>
+            <a:spLocks noGrp="1"/>
+          </p:cNvSpPr>
+          <p:nvPr>
+            <p:ph type="ftr" sz="quarter" idx="11"/>
+          </p:nvPr>
+        </p:nvSpPr>
+        <p:spPr/>
+        <p:txBody>
+          <a:bodyPr/>
+          <a:lstStyle/>
+          <a:p>
+            <a:endParaRPr lang="de-DE"/>
+          </a:p>
+        </p:txBody>
+      </p:sp>
+      <p:sp>
+        <p:nvSpPr>
+          <p:cNvPr id="7" name="Espaço Reservado para Número de Slide 6"/>
+          <p:cNvSpPr>
+            <a:spLocks noGrp="1"/>
+          </p:cNvSpPr>
+          <p:nvPr>
+            <p:ph type="sldNum" sz="quarter" idx="12"/>
+          </p:nvPr>
+        </p:nvSpPr>
+        <p:spPr/>
+        <p:txBody>
+          <a:bodyPr/>
+          <a:lstStyle/>
+          <a:p>
+            <a:fld id="{754FE2FE-B55E-4328-8F5C-2CEB8781A47B}" type="slidenum">
+              <a:rPr lang="de-DE" smtClean="0"/>
+              <a:t>‹nº›</a:t>
+            </a:fld>
+            <a:endParaRPr lang="de-DE"/>
+          </a:p>
+        </p:txBody>
+      </p:sp>
+    </p:spTree>
+    <p:extLst>
+      <p:ext uri="{BB962C8B-B14F-4D97-AF65-F5344CB8AC3E}">
+        <p14:creationId xmlns:p14="http://schemas.microsoft.com/office/powerpoint/2010/main" val="2124613824"/>
+      </p:ext>
+    </p:extLst>
+  </p:cSld>
+  <p:clrMapOvr>
+    <a:masterClrMapping/>
+  </p:clrMapOvr>
+</p:sldLayout>
+</file>
+
+<file path=ppt/slideLayouts/slideLayout5.xml><?xml version="1.0" encoding="utf-8"?>
+<p:sldLayout xmlns:a="http://schemas.openxmlformats.org/drawingml/2006/main" xmlns:r="http://schemas.openxmlformats.org/officeDocument/2006/relationships" xmlns:p="http://schemas.openxmlformats.org/presentationml/2006/main" type="twoTxTwoObj" preserve="1">
+  <p:cSld name="Comparação">
+    <p:spTree>
+      <p:nvGrpSpPr>
+        <p:cNvPr id="1" name=""/>
+        <p:cNvGrpSpPr/>
+        <p:nvPr/>
+      </p:nvGrpSpPr>
+      <p:grpSpPr>
+        <a:xfrm>
+          <a:off x="0" y="0"/>
+          <a:ext cx="0" cy="0"/>
+          <a:chOff x="0" y="0"/>
+          <a:chExt cx="0" cy="0"/>
+        </a:xfrm>
+      </p:grpSpPr>
+      <p:sp>
+        <p:nvSpPr>
+          <p:cNvPr id="2" name="Título 1"/>
+          <p:cNvSpPr>
+            <a:spLocks noGrp="1"/>
+          </p:cNvSpPr>
+          <p:nvPr>
+            <p:ph type="title"/>
+          </p:nvPr>
+        </p:nvSpPr>
+        <p:spPr>
+          <a:xfrm>
+            <a:off x="839788" y="365125"/>
+            <a:ext cx="10515600" cy="1325563"/>
+          </a:xfrm>
+        </p:spPr>
+        <p:txBody>
+          <a:bodyPr/>
+          <a:lstStyle/>
+          <a:p>
+            <a:r>
+              <a:rPr lang="pt-BR"/>
+              <a:t>Clique para editar o título mestre</a:t>
+            </a:r>
+            <a:endParaRPr lang="de-DE"/>
+          </a:p>
+        </p:txBody>
+      </p:sp>
+      <p:sp>
+        <p:nvSpPr>
+          <p:cNvPr id="3" name="Espaço Reservado para Texto 2"/>
           <p:cNvSpPr>
             <a:spLocks noGrp="1"/>
           </p:cNvSpPr>
@@ -1470,8 +1868,8 @@
         </p:nvSpPr>
         <p:spPr>
           <a:xfrm>
-            <a:off x="457200" y="1535113"/>
-            <a:ext cx="4040188" cy="639762"/>
+            <a:off x="839788" y="1681163"/>
+            <a:ext cx="5157787" cy="823912"/>
           </a:xfrm>
         </p:spPr>
         <p:txBody>
@@ -1517,15 +1915,15 @@
           <a:p>
             <a:pPr lvl="0"/>
             <a:r>
-              <a:rPr lang="en-US"/>
-              <a:t>Click to edit Master text styles</a:t>
+              <a:rPr lang="pt-BR"/>
+              <a:t>Clique para editar o texto mestre</a:t>
             </a:r>
           </a:p>
         </p:txBody>
       </p:sp>
       <p:sp>
         <p:nvSpPr>
-          <p:cNvPr id="4" name="Content Placeholder 3"/>
+          <p:cNvPr id="4" name="Espaço Reservado para Conteúdo 3"/>
           <p:cNvSpPr>
             <a:spLocks noGrp="1"/>
           </p:cNvSpPr>
@@ -1535,81 +1933,54 @@
         </p:nvSpPr>
         <p:spPr>
           <a:xfrm>
-            <a:off x="457200" y="2174875"/>
-            <a:ext cx="4040188" cy="3951288"/>
+            <a:off x="839788" y="2505075"/>
+            <a:ext cx="5157787" cy="3684588"/>
           </a:xfrm>
         </p:spPr>
         <p:txBody>
           <a:bodyPr/>
-          <a:lstStyle>
-            <a:lvl1pPr>
-              <a:defRPr sz="2400"/>
-            </a:lvl1pPr>
-            <a:lvl2pPr>
-              <a:defRPr sz="2000"/>
-            </a:lvl2pPr>
-            <a:lvl3pPr>
-              <a:defRPr sz="1800"/>
-            </a:lvl3pPr>
-            <a:lvl4pPr>
-              <a:defRPr sz="1600"/>
-            </a:lvl4pPr>
-            <a:lvl5pPr>
-              <a:defRPr sz="1600"/>
-            </a:lvl5pPr>
-            <a:lvl6pPr>
-              <a:defRPr sz="1600"/>
-            </a:lvl6pPr>
-            <a:lvl7pPr>
-              <a:defRPr sz="1600"/>
-            </a:lvl7pPr>
-            <a:lvl8pPr>
-              <a:defRPr sz="1600"/>
-            </a:lvl8pPr>
-            <a:lvl9pPr>
-              <a:defRPr sz="1600"/>
-            </a:lvl9pPr>
-          </a:lstStyle>
+          <a:lstStyle/>
           <a:p>
             <a:pPr lvl="0"/>
             <a:r>
-              <a:rPr lang="en-US"/>
-              <a:t>Click to edit Master text styles</a:t>
+              <a:rPr lang="pt-BR"/>
+              <a:t>Clique para editar o texto mestre</a:t>
             </a:r>
           </a:p>
           <a:p>
             <a:pPr lvl="1"/>
             <a:r>
-              <a:rPr lang="en-US"/>
-              <a:t>Second level</a:t>
+              <a:rPr lang="pt-BR"/>
+              <a:t>Segundo nível</a:t>
             </a:r>
           </a:p>
           <a:p>
             <a:pPr lvl="2"/>
             <a:r>
-              <a:rPr lang="en-US"/>
-              <a:t>Third level</a:t>
+              <a:rPr lang="pt-BR"/>
+              <a:t>Terceiro nível</a:t>
             </a:r>
           </a:p>
           <a:p>
             <a:pPr lvl="3"/>
             <a:r>
-              <a:rPr lang="en-US"/>
-              <a:t>Fourth level</a:t>
+              <a:rPr lang="pt-BR"/>
+              <a:t>Quarto nível</a:t>
             </a:r>
           </a:p>
           <a:p>
             <a:pPr lvl="4"/>
             <a:r>
-              <a:rPr lang="en-US"/>
-              <a:t>Fifth level</a:t>
-            </a:r>
+              <a:rPr lang="pt-BR"/>
+              <a:t>Quinto nível</a:t>
+            </a:r>
+            <a:endParaRPr lang="de-DE"/>
           </a:p>
         </p:txBody>
       </p:sp>
       <p:sp>
         <p:nvSpPr>
-          <p:cNvPr id="5" name="Text Placeholder 4"/>
+          <p:cNvPr id="5" name="Espaço Reservado para Texto 4"/>
           <p:cNvSpPr>
             <a:spLocks noGrp="1"/>
           </p:cNvSpPr>
@@ -1619,8 +1990,8 @@
         </p:nvSpPr>
         <p:spPr>
           <a:xfrm>
-            <a:off x="4645025" y="1535113"/>
-            <a:ext cx="4041775" cy="639762"/>
+            <a:off x="6172200" y="1681163"/>
+            <a:ext cx="5183188" cy="823912"/>
           </a:xfrm>
         </p:spPr>
         <p:txBody>
@@ -1666,15 +2037,15 @@
           <a:p>
             <a:pPr lvl="0"/>
             <a:r>
-              <a:rPr lang="en-US"/>
-              <a:t>Click to edit Master text styles</a:t>
+              <a:rPr lang="pt-BR"/>
+              <a:t>Clique para editar o texto mestre</a:t>
             </a:r>
           </a:p>
         </p:txBody>
       </p:sp>
       <p:sp>
         <p:nvSpPr>
-          <p:cNvPr id="6" name="Content Placeholder 5"/>
+          <p:cNvPr id="6" name="Espaço Reservado para Conteúdo 5"/>
           <p:cNvSpPr>
             <a:spLocks noGrp="1"/>
           </p:cNvSpPr>
@@ -1684,81 +2055,54 @@
         </p:nvSpPr>
         <p:spPr>
           <a:xfrm>
-            <a:off x="4645025" y="2174875"/>
-            <a:ext cx="4041775" cy="3951288"/>
+            <a:off x="6172200" y="2505075"/>
+            <a:ext cx="5183188" cy="3684588"/>
           </a:xfrm>
         </p:spPr>
         <p:txBody>
           <a:bodyPr/>
-          <a:lstStyle>
-            <a:lvl1pPr>
-              <a:defRPr sz="2400"/>
-            </a:lvl1pPr>
-            <a:lvl2pPr>
-              <a:defRPr sz="2000"/>
-            </a:lvl2pPr>
-            <a:lvl3pPr>
-              <a:defRPr sz="1800"/>
-            </a:lvl3pPr>
-            <a:lvl4pPr>
-              <a:defRPr sz="1600"/>
-            </a:lvl4pPr>
-            <a:lvl5pPr>
-              <a:defRPr sz="1600"/>
-            </a:lvl5pPr>
-            <a:lvl6pPr>
-              <a:defRPr sz="1600"/>
-            </a:lvl6pPr>
-            <a:lvl7pPr>
-              <a:defRPr sz="1600"/>
-            </a:lvl7pPr>
-            <a:lvl8pPr>
-              <a:defRPr sz="1600"/>
-            </a:lvl8pPr>
-            <a:lvl9pPr>
-              <a:defRPr sz="1600"/>
-            </a:lvl9pPr>
-          </a:lstStyle>
+          <a:lstStyle/>
           <a:p>
             <a:pPr lvl="0"/>
             <a:r>
-              <a:rPr lang="en-US"/>
-              <a:t>Click to edit Master text styles</a:t>
+              <a:rPr lang="pt-BR"/>
+              <a:t>Clique para editar o texto mestre</a:t>
             </a:r>
           </a:p>
           <a:p>
             <a:pPr lvl="1"/>
             <a:r>
-              <a:rPr lang="en-US"/>
-              <a:t>Second level</a:t>
+              <a:rPr lang="pt-BR"/>
+              <a:t>Segundo nível</a:t>
             </a:r>
           </a:p>
           <a:p>
             <a:pPr lvl="2"/>
             <a:r>
-              <a:rPr lang="en-US"/>
-              <a:t>Third level</a:t>
+              <a:rPr lang="pt-BR"/>
+              <a:t>Terceiro nível</a:t>
             </a:r>
           </a:p>
           <a:p>
             <a:pPr lvl="3"/>
             <a:r>
-              <a:rPr lang="en-US"/>
-              <a:t>Fourth level</a:t>
+              <a:rPr lang="pt-BR"/>
+              <a:t>Quarto nível</a:t>
             </a:r>
           </a:p>
           <a:p>
             <a:pPr lvl="4"/>
             <a:r>
-              <a:rPr lang="en-US"/>
-              <a:t>Fifth level</a:t>
-            </a:r>
+              <a:rPr lang="pt-BR"/>
+              <a:t>Quinto nível</a:t>
+            </a:r>
+            <a:endParaRPr lang="de-DE"/>
           </a:p>
         </p:txBody>
       </p:sp>
       <p:sp>
         <p:nvSpPr>
-          <p:cNvPr id="7" name="Date Placeholder 6"/>
+          <p:cNvPr id="7" name="Espaço Reservado para Data 6"/>
           <p:cNvSpPr>
             <a:spLocks noGrp="1"/>
           </p:cNvSpPr>
@@ -1771,17 +2115,17 @@
           <a:bodyPr/>
           <a:lstStyle/>
           <a:p>
-            <a:fld id="{5BCAD085-E8A6-8845-BD4E-CB4CCA059FC4}" type="datetimeFigureOut">
-              <a:rPr lang="en-US" smtClean="0"/>
-              <a:t>5/19/2026</a:t>
+            <a:fld id="{F0E51C7C-CEA3-4CAA-BE4B-344879E7C377}" type="datetimeFigureOut">
+              <a:rPr lang="de-DE" smtClean="0"/>
+              <a:t>29.05.2026</a:t>
             </a:fld>
-            <a:endParaRPr lang="en-US"/>
+            <a:endParaRPr lang="de-DE"/>
           </a:p>
         </p:txBody>
       </p:sp>
       <p:sp>
         <p:nvSpPr>
-          <p:cNvPr id="8" name="Footer Placeholder 7"/>
+          <p:cNvPr id="8" name="Espaço Reservado para Rodapé 7"/>
           <p:cNvSpPr>
             <a:spLocks noGrp="1"/>
           </p:cNvSpPr>
@@ -1794,13 +2138,13 @@
           <a:bodyPr/>
           <a:lstStyle/>
           <a:p>
-            <a:endParaRPr lang="en-US"/>
+            <a:endParaRPr lang="de-DE"/>
           </a:p>
         </p:txBody>
       </p:sp>
       <p:sp>
         <p:nvSpPr>
-          <p:cNvPr id="9" name="Slide Number Placeholder 8"/>
+          <p:cNvPr id="9" name="Espaço Reservado para Número de Slide 8"/>
           <p:cNvSpPr>
             <a:spLocks noGrp="1"/>
           </p:cNvSpPr>
@@ -1813,18 +2157,18 @@
           <a:bodyPr/>
           <a:lstStyle/>
           <a:p>
-            <a:fld id="{C1FF6DA9-008F-8B48-92A6-B652298478BF}" type="slidenum">
-              <a:rPr lang="en-US" smtClean="0"/>
+            <a:fld id="{754FE2FE-B55E-4328-8F5C-2CEB8781A47B}" type="slidenum">
+              <a:rPr lang="de-DE" smtClean="0"/>
               <a:t>‹nº›</a:t>
             </a:fld>
-            <a:endParaRPr lang="en-US"/>
+            <a:endParaRPr lang="de-DE"/>
           </a:p>
         </p:txBody>
       </p:sp>
     </p:spTree>
     <p:extLst>
       <p:ext uri="{BB962C8B-B14F-4D97-AF65-F5344CB8AC3E}">
-        <p14:creationId xmlns:p14="http://schemas.microsoft.com/office/powerpoint/2010/main" val="990158736"/>
+        <p14:creationId xmlns:p14="http://schemas.microsoft.com/office/powerpoint/2010/main" val="3694421058"/>
       </p:ext>
     </p:extLst>
   </p:cSld>
@@ -1836,7 +2180,7 @@
 
 <file path=ppt/slideLayouts/slideLayout6.xml><?xml version="1.0" encoding="utf-8"?>
 <p:sldLayout xmlns:a="http://schemas.openxmlformats.org/drawingml/2006/main" xmlns:r="http://schemas.openxmlformats.org/officeDocument/2006/relationships" xmlns:p="http://schemas.openxmlformats.org/presentationml/2006/main" type="titleOnly" preserve="1">
-  <p:cSld name="Title Only">
+  <p:cSld name="Somente título">
     <p:spTree>
       <p:nvGrpSpPr>
         <p:cNvPr id="1" name=""/>
@@ -1853,7 +2197,7 @@
       </p:grpSpPr>
       <p:sp>
         <p:nvSpPr>
-          <p:cNvPr id="2" name="Title 1"/>
+          <p:cNvPr id="2" name="Título 1"/>
           <p:cNvSpPr>
             <a:spLocks noGrp="1"/>
           </p:cNvSpPr>
@@ -1867,15 +2211,16 @@
           <a:lstStyle/>
           <a:p>
             <a:r>
-              <a:rPr lang="en-US"/>
-              <a:t>Click to edit Master title style</a:t>
-            </a:r>
+              <a:rPr lang="pt-BR"/>
+              <a:t>Clique para editar o título mestre</a:t>
+            </a:r>
+            <a:endParaRPr lang="de-DE"/>
           </a:p>
         </p:txBody>
       </p:sp>
       <p:sp>
         <p:nvSpPr>
-          <p:cNvPr id="3" name="Date Placeholder 2"/>
+          <p:cNvPr id="3" name="Espaço Reservado para Data 2"/>
           <p:cNvSpPr>
             <a:spLocks noGrp="1"/>
           </p:cNvSpPr>
@@ -1888,17 +2233,17 @@
           <a:bodyPr/>
           <a:lstStyle/>
           <a:p>
-            <a:fld id="{5BCAD085-E8A6-8845-BD4E-CB4CCA059FC4}" type="datetimeFigureOut">
-              <a:rPr lang="en-US" smtClean="0"/>
-              <a:t>5/19/2026</a:t>
+            <a:fld id="{F0E51C7C-CEA3-4CAA-BE4B-344879E7C377}" type="datetimeFigureOut">
+              <a:rPr lang="de-DE" smtClean="0"/>
+              <a:t>29.05.2026</a:t>
             </a:fld>
-            <a:endParaRPr lang="en-US"/>
+            <a:endParaRPr lang="de-DE"/>
           </a:p>
         </p:txBody>
       </p:sp>
       <p:sp>
         <p:nvSpPr>
-          <p:cNvPr id="4" name="Footer Placeholder 3"/>
+          <p:cNvPr id="4" name="Espaço Reservado para Rodapé 3"/>
           <p:cNvSpPr>
             <a:spLocks noGrp="1"/>
           </p:cNvSpPr>
@@ -1911,13 +2256,13 @@
           <a:bodyPr/>
           <a:lstStyle/>
           <a:p>
-            <a:endParaRPr lang="en-US"/>
+            <a:endParaRPr lang="de-DE"/>
           </a:p>
         </p:txBody>
       </p:sp>
       <p:sp>
         <p:nvSpPr>
-          <p:cNvPr id="5" name="Slide Number Placeholder 4"/>
+          <p:cNvPr id="5" name="Espaço Reservado para Número de Slide 4"/>
           <p:cNvSpPr>
             <a:spLocks noGrp="1"/>
           </p:cNvSpPr>
@@ -1930,18 +2275,18 @@
           <a:bodyPr/>
           <a:lstStyle/>
           <a:p>
-            <a:fld id="{C1FF6DA9-008F-8B48-92A6-B652298478BF}" type="slidenum">
-              <a:rPr lang="en-US" smtClean="0"/>
+            <a:fld id="{754FE2FE-B55E-4328-8F5C-2CEB8781A47B}" type="slidenum">
+              <a:rPr lang="de-DE" smtClean="0"/>
               <a:t>‹nº›</a:t>
             </a:fld>
-            <a:endParaRPr lang="en-US"/>
+            <a:endParaRPr lang="de-DE"/>
           </a:p>
         </p:txBody>
       </p:sp>
     </p:spTree>
     <p:extLst>
       <p:ext uri="{BB962C8B-B14F-4D97-AF65-F5344CB8AC3E}">
-        <p14:creationId xmlns:p14="http://schemas.microsoft.com/office/powerpoint/2010/main" val="727027711"/>
+        <p14:creationId xmlns:p14="http://schemas.microsoft.com/office/powerpoint/2010/main" val="3108533492"/>
       </p:ext>
     </p:extLst>
   </p:cSld>
@@ -1953,7 +2298,7 @@
 
 <file path=ppt/slideLayouts/slideLayout7.xml><?xml version="1.0" encoding="utf-8"?>
 <p:sldLayout xmlns:a="http://schemas.openxmlformats.org/drawingml/2006/main" xmlns:r="http://schemas.openxmlformats.org/officeDocument/2006/relationships" xmlns:p="http://schemas.openxmlformats.org/presentationml/2006/main" type="blank" preserve="1">
-  <p:cSld name="Blank">
+  <p:cSld name="Em branco">
     <p:spTree>
       <p:nvGrpSpPr>
         <p:cNvPr id="1" name=""/>
@@ -1970,7 +2315,7 @@
       </p:grpSpPr>
       <p:sp>
         <p:nvSpPr>
-          <p:cNvPr id="2" name="Date Placeholder 1"/>
+          <p:cNvPr id="2" name="Espaço Reservado para Data 1"/>
           <p:cNvSpPr>
             <a:spLocks noGrp="1"/>
           </p:cNvSpPr>
@@ -1983,17 +2328,17 @@
           <a:bodyPr/>
           <a:lstStyle/>
           <a:p>
-            <a:fld id="{5BCAD085-E8A6-8845-BD4E-CB4CCA059FC4}" type="datetimeFigureOut">
-              <a:rPr lang="en-US" smtClean="0"/>
-              <a:t>5/19/2026</a:t>
+            <a:fld id="{F0E51C7C-CEA3-4CAA-BE4B-344879E7C377}" type="datetimeFigureOut">
+              <a:rPr lang="de-DE" smtClean="0"/>
+              <a:t>29.05.2026</a:t>
             </a:fld>
-            <a:endParaRPr lang="en-US"/>
+            <a:endParaRPr lang="de-DE"/>
           </a:p>
         </p:txBody>
       </p:sp>
       <p:sp>
         <p:nvSpPr>
-          <p:cNvPr id="3" name="Footer Placeholder 2"/>
+          <p:cNvPr id="3" name="Espaço Reservado para Rodapé 2"/>
           <p:cNvSpPr>
             <a:spLocks noGrp="1"/>
           </p:cNvSpPr>
@@ -2006,13 +2351,13 @@
           <a:bodyPr/>
           <a:lstStyle/>
           <a:p>
-            <a:endParaRPr lang="en-US"/>
+            <a:endParaRPr lang="de-DE"/>
           </a:p>
         </p:txBody>
       </p:sp>
       <p:sp>
         <p:nvSpPr>
-          <p:cNvPr id="4" name="Slide Number Placeholder 3"/>
+          <p:cNvPr id="4" name="Espaço Reservado para Número de Slide 3"/>
           <p:cNvSpPr>
             <a:spLocks noGrp="1"/>
           </p:cNvSpPr>
@@ -2025,18 +2370,18 @@
           <a:bodyPr/>
           <a:lstStyle/>
           <a:p>
-            <a:fld id="{C1FF6DA9-008F-8B48-92A6-B652298478BF}" type="slidenum">
-              <a:rPr lang="en-US" smtClean="0"/>
+            <a:fld id="{754FE2FE-B55E-4328-8F5C-2CEB8781A47B}" type="slidenum">
+              <a:rPr lang="de-DE" smtClean="0"/>
               <a:t>‹nº›</a:t>
             </a:fld>
-            <a:endParaRPr lang="en-US"/>
+            <a:endParaRPr lang="de-DE"/>
           </a:p>
         </p:txBody>
       </p:sp>
     </p:spTree>
     <p:extLst>
       <p:ext uri="{BB962C8B-B14F-4D97-AF65-F5344CB8AC3E}">
-        <p14:creationId xmlns:p14="http://schemas.microsoft.com/office/powerpoint/2010/main" val="1212999818"/>
+        <p14:creationId xmlns:p14="http://schemas.microsoft.com/office/powerpoint/2010/main" val="578281579"/>
       </p:ext>
     </p:extLst>
   </p:cSld>
@@ -2048,7 +2393,7 @@
 
 <file path=ppt/slideLayouts/slideLayout8.xml><?xml version="1.0" encoding="utf-8"?>
 <p:sldLayout xmlns:a="http://schemas.openxmlformats.org/drawingml/2006/main" xmlns:r="http://schemas.openxmlformats.org/officeDocument/2006/relationships" xmlns:p="http://schemas.openxmlformats.org/presentationml/2006/main" type="objTx" preserve="1">
-  <p:cSld name="Content with Caption">
+  <p:cSld name="Conteúdo com Legenda">
     <p:spTree>
       <p:nvGrpSpPr>
         <p:cNvPr id="1" name=""/>
@@ -2065,7 +2410,7 @@
       </p:grpSpPr>
       <p:sp>
         <p:nvSpPr>
-          <p:cNvPr id="2" name="Title 1"/>
+          <p:cNvPr id="2" name="Título 1"/>
           <p:cNvSpPr>
             <a:spLocks noGrp="1"/>
           </p:cNvSpPr>
@@ -2075,28 +2420,29 @@
         </p:nvSpPr>
         <p:spPr>
           <a:xfrm>
-            <a:off x="457200" y="273050"/>
-            <a:ext cx="3008313" cy="1162050"/>
+            <a:off x="839788" y="457200"/>
+            <a:ext cx="3932237" cy="1600200"/>
           </a:xfrm>
         </p:spPr>
         <p:txBody>
           <a:bodyPr anchor="b"/>
           <a:lstStyle>
-            <a:lvl1pPr algn="l">
-              <a:defRPr sz="2000" b="1"/>
+            <a:lvl1pPr>
+              <a:defRPr sz="3200"/>
             </a:lvl1pPr>
           </a:lstStyle>
           <a:p>
             <a:r>
-              <a:rPr lang="en-US"/>
-              <a:t>Click to edit Master title style</a:t>
-            </a:r>
+              <a:rPr lang="pt-BR"/>
+              <a:t>Clique para editar o título mestre</a:t>
+            </a:r>
+            <a:endParaRPr lang="de-DE"/>
           </a:p>
         </p:txBody>
       </p:sp>
       <p:sp>
         <p:nvSpPr>
-          <p:cNvPr id="3" name="Content Placeholder 2"/>
+          <p:cNvPr id="3" name="Espaço Reservado para Conteúdo 2"/>
           <p:cNvSpPr>
             <a:spLocks noGrp="1"/>
           </p:cNvSpPr>
@@ -2106,8 +2452,8 @@
         </p:nvSpPr>
         <p:spPr>
           <a:xfrm>
-            <a:off x="3575050" y="273050"/>
-            <a:ext cx="5111750" cy="5853113"/>
+            <a:off x="5183188" y="987425"/>
+            <a:ext cx="6172200" cy="4873625"/>
           </a:xfrm>
         </p:spPr>
         <p:txBody>
@@ -2144,43 +2490,44 @@
           <a:p>
             <a:pPr lvl="0"/>
             <a:r>
-              <a:rPr lang="en-US"/>
-              <a:t>Click to edit Master text styles</a:t>
+              <a:rPr lang="pt-BR"/>
+              <a:t>Clique para editar o texto mestre</a:t>
             </a:r>
           </a:p>
           <a:p>
             <a:pPr lvl="1"/>
             <a:r>
-              <a:rPr lang="en-US"/>
-              <a:t>Second level</a:t>
+              <a:rPr lang="pt-BR"/>
+              <a:t>Segundo nível</a:t>
             </a:r>
           </a:p>
           <a:p>
             <a:pPr lvl="2"/>
             <a:r>
-              <a:rPr lang="en-US"/>
-              <a:t>Third level</a:t>
+              <a:rPr lang="pt-BR"/>
+              <a:t>Terceiro nível</a:t>
             </a:r>
           </a:p>
           <a:p>
             <a:pPr lvl="3"/>
             <a:r>
-              <a:rPr lang="en-US"/>
-              <a:t>Fourth level</a:t>
+              <a:rPr lang="pt-BR"/>
+              <a:t>Quarto nível</a:t>
             </a:r>
           </a:p>
           <a:p>
             <a:pPr lvl="4"/>
             <a:r>
-              <a:rPr lang="en-US"/>
-              <a:t>Fifth level</a:t>
-            </a:r>
+              <a:rPr lang="pt-BR"/>
+              <a:t>Quinto nível</a:t>
+            </a:r>
+            <a:endParaRPr lang="de-DE"/>
           </a:p>
         </p:txBody>
       </p:sp>
       <p:sp>
         <p:nvSpPr>
-          <p:cNvPr id="4" name="Text Placeholder 3"/>
+          <p:cNvPr id="4" name="Espaço Reservado para Texto 3"/>
           <p:cNvSpPr>
             <a:spLocks noGrp="1"/>
           </p:cNvSpPr>
@@ -2190,8 +2537,8 @@
         </p:nvSpPr>
         <p:spPr>
           <a:xfrm>
-            <a:off x="457200" y="1435100"/>
-            <a:ext cx="3008313" cy="4691063"/>
+            <a:off x="839788" y="2057400"/>
+            <a:ext cx="3932237" cy="3811588"/>
           </a:xfrm>
         </p:spPr>
         <p:txBody>
@@ -2199,53 +2546,53 @@
           <a:lstStyle>
             <a:lvl1pPr marL="0" indent="0">
               <a:buNone/>
-              <a:defRPr sz="1400"/>
+              <a:defRPr sz="1600"/>
             </a:lvl1pPr>
             <a:lvl2pPr marL="457200" indent="0">
               <a:buNone/>
-              <a:defRPr sz="1200"/>
+              <a:defRPr sz="1400"/>
             </a:lvl2pPr>
             <a:lvl3pPr marL="914400" indent="0">
               <a:buNone/>
-              <a:defRPr sz="1000"/>
+              <a:defRPr sz="1200"/>
             </a:lvl3pPr>
             <a:lvl4pPr marL="1371600" indent="0">
               <a:buNone/>
-              <a:defRPr sz="900"/>
+              <a:defRPr sz="1000"/>
             </a:lvl4pPr>
             <a:lvl5pPr marL="1828800" indent="0">
               <a:buNone/>
-              <a:defRPr sz="900"/>
+              <a:defRPr sz="1000"/>
             </a:lvl5pPr>
             <a:lvl6pPr marL="2286000" indent="0">
               <a:buNone/>
-              <a:defRPr sz="900"/>
+              <a:defRPr sz="1000"/>
             </a:lvl6pPr>
             <a:lvl7pPr marL="2743200" indent="0">
               <a:buNone/>
-              <a:defRPr sz="900"/>
+              <a:defRPr sz="1000"/>
             </a:lvl7pPr>
             <a:lvl8pPr marL="3200400" indent="0">
               <a:buNone/>
-              <a:defRPr sz="900"/>
+              <a:defRPr sz="1000"/>
             </a:lvl8pPr>
             <a:lvl9pPr marL="3657600" indent="0">
               <a:buNone/>
-              <a:defRPr sz="900"/>
+              <a:defRPr sz="1000"/>
             </a:lvl9pPr>
           </a:lstStyle>
           <a:p>
             <a:pPr lvl="0"/>
             <a:r>
-              <a:rPr lang="en-US"/>
-              <a:t>Click to edit Master text styles</a:t>
+              <a:rPr lang="pt-BR"/>
+              <a:t>Clique para editar o texto mestre</a:t>
             </a:r>
           </a:p>
         </p:txBody>
       </p:sp>
       <p:sp>
         <p:nvSpPr>
-          <p:cNvPr id="5" name="Date Placeholder 4"/>
+          <p:cNvPr id="5" name="Espaço Reservado para Data 4"/>
           <p:cNvSpPr>
             <a:spLocks noGrp="1"/>
           </p:cNvSpPr>
@@ -2258,17 +2605,17 @@
           <a:bodyPr/>
           <a:lstStyle/>
           <a:p>
-            <a:fld id="{5BCAD085-E8A6-8845-BD4E-CB4CCA059FC4}" type="datetimeFigureOut">
-              <a:rPr lang="en-US" smtClean="0"/>
-              <a:t>5/19/2026</a:t>
+            <a:fld id="{F0E51C7C-CEA3-4CAA-BE4B-344879E7C377}" type="datetimeFigureOut">
+              <a:rPr lang="de-DE" smtClean="0"/>
+              <a:t>29.05.2026</a:t>
             </a:fld>
-            <a:endParaRPr lang="en-US"/>
+            <a:endParaRPr lang="de-DE"/>
           </a:p>
         </p:txBody>
       </p:sp>
       <p:sp>
         <p:nvSpPr>
-          <p:cNvPr id="6" name="Footer Placeholder 5"/>
+          <p:cNvPr id="6" name="Espaço Reservado para Rodapé 5"/>
           <p:cNvSpPr>
             <a:spLocks noGrp="1"/>
           </p:cNvSpPr>
@@ -2281,13 +2628,13 @@
           <a:bodyPr/>
           <a:lstStyle/>
           <a:p>
-            <a:endParaRPr lang="en-US"/>
+            <a:endParaRPr lang="de-DE"/>
           </a:p>
         </p:txBody>
       </p:sp>
       <p:sp>
         <p:nvSpPr>
-          <p:cNvPr id="7" name="Slide Number Placeholder 6"/>
+          <p:cNvPr id="7" name="Espaço Reservado para Número de Slide 6"/>
           <p:cNvSpPr>
             <a:spLocks noGrp="1"/>
           </p:cNvSpPr>
@@ -2300,18 +2647,18 @@
           <a:bodyPr/>
           <a:lstStyle/>
           <a:p>
-            <a:fld id="{C1FF6DA9-008F-8B48-92A6-B652298478BF}" type="slidenum">
-              <a:rPr lang="en-US" smtClean="0"/>
+            <a:fld id="{754FE2FE-B55E-4328-8F5C-2CEB8781A47B}" type="slidenum">
+              <a:rPr lang="de-DE" smtClean="0"/>
               <a:t>‹nº›</a:t>
             </a:fld>
-            <a:endParaRPr lang="en-US"/>
+            <a:endParaRPr lang="de-DE"/>
           </a:p>
         </p:txBody>
       </p:sp>
     </p:spTree>
     <p:extLst>
       <p:ext uri="{BB962C8B-B14F-4D97-AF65-F5344CB8AC3E}">
-        <p14:creationId xmlns:p14="http://schemas.microsoft.com/office/powerpoint/2010/main" val="1840726560"/>
+        <p14:creationId xmlns:p14="http://schemas.microsoft.com/office/powerpoint/2010/main" val="2217836567"/>
       </p:ext>
     </p:extLst>
   </p:cSld>
@@ -2323,7 +2670,7 @@
 
 <file path=ppt/slideLayouts/slideLayout9.xml><?xml version="1.0" encoding="utf-8"?>
 <p:sldLayout xmlns:a="http://schemas.openxmlformats.org/drawingml/2006/main" xmlns:r="http://schemas.openxmlformats.org/officeDocument/2006/relationships" xmlns:p="http://schemas.openxmlformats.org/presentationml/2006/main" type="picTx" preserve="1">
-  <p:cSld name="Picture with Caption">
+  <p:cSld name="Imagem com Legenda">
     <p:spTree>
       <p:nvGrpSpPr>
         <p:cNvPr id="1" name=""/>
@@ -2340,7 +2687,7 @@
       </p:grpSpPr>
       <p:sp>
         <p:nvSpPr>
-          <p:cNvPr id="2" name="Title 1"/>
+          <p:cNvPr id="2" name="Título 1"/>
           <p:cNvSpPr>
             <a:spLocks noGrp="1"/>
           </p:cNvSpPr>
@@ -2350,28 +2697,29 @@
         </p:nvSpPr>
         <p:spPr>
           <a:xfrm>
-            <a:off x="1792288" y="4800600"/>
-            <a:ext cx="5486400" cy="566738"/>
+            <a:off x="839788" y="457200"/>
+            <a:ext cx="3932237" cy="1600200"/>
           </a:xfrm>
         </p:spPr>
         <p:txBody>
           <a:bodyPr anchor="b"/>
           <a:lstStyle>
-            <a:lvl1pPr algn="l">
-              <a:defRPr sz="2000" b="1"/>
+            <a:lvl1pPr>
+              <a:defRPr sz="3200"/>
             </a:lvl1pPr>
           </a:lstStyle>
           <a:p>
             <a:r>
-              <a:rPr lang="en-US"/>
-              <a:t>Click to edit Master title style</a:t>
-            </a:r>
+              <a:rPr lang="pt-BR"/>
+              <a:t>Clique para editar o título mestre</a:t>
+            </a:r>
+            <a:endParaRPr lang="de-DE"/>
           </a:p>
         </p:txBody>
       </p:sp>
       <p:sp>
         <p:nvSpPr>
-          <p:cNvPr id="3" name="Picture Placeholder 2"/>
+          <p:cNvPr id="3" name="Espaço Reservado para Imagem 2"/>
           <p:cNvSpPr>
             <a:spLocks noGrp="1"/>
           </p:cNvSpPr>
@@ -2381,8 +2729,8 @@
         </p:nvSpPr>
         <p:spPr>
           <a:xfrm>
-            <a:off x="1792288" y="612775"/>
-            <a:ext cx="5486400" cy="4114800"/>
+            <a:off x="5183188" y="987425"/>
+            <a:ext cx="6172200" cy="4873625"/>
           </a:xfrm>
         </p:spPr>
         <p:txBody>
@@ -2426,13 +2774,13 @@
             </a:lvl9pPr>
           </a:lstStyle>
           <a:p>
-            <a:endParaRPr lang="en-US"/>
+            <a:endParaRPr lang="de-DE"/>
           </a:p>
         </p:txBody>
       </p:sp>
       <p:sp>
         <p:nvSpPr>
-          <p:cNvPr id="4" name="Text Placeholder 3"/>
+          <p:cNvPr id="4" name="Espaço Reservado para Texto 3"/>
           <p:cNvSpPr>
             <a:spLocks noGrp="1"/>
           </p:cNvSpPr>
@@ -2442,8 +2790,8 @@
         </p:nvSpPr>
         <p:spPr>
           <a:xfrm>
-            <a:off x="1792288" y="5367338"/>
-            <a:ext cx="5486400" cy="804862"/>
+            <a:off x="839788" y="2057400"/>
+            <a:ext cx="3932237" cy="3811588"/>
           </a:xfrm>
         </p:spPr>
         <p:txBody>
@@ -2451,53 +2799,53 @@
           <a:lstStyle>
             <a:lvl1pPr marL="0" indent="0">
               <a:buNone/>
-              <a:defRPr sz="1400"/>
+              <a:defRPr sz="1600"/>
             </a:lvl1pPr>
             <a:lvl2pPr marL="457200" indent="0">
               <a:buNone/>
-              <a:defRPr sz="1200"/>
+              <a:defRPr sz="1400"/>
             </a:lvl2pPr>
             <a:lvl3pPr marL="914400" indent="0">
               <a:buNone/>
-              <a:defRPr sz="1000"/>
+              <a:defRPr sz="1200"/>
             </a:lvl3pPr>
             <a:lvl4pPr marL="1371600" indent="0">
               <a:buNone/>
-              <a:defRPr sz="900"/>
+              <a:defRPr sz="1000"/>
             </a:lvl4pPr>
             <a:lvl5pPr marL="1828800" indent="0">
               <a:buNone/>
-              <a:defRPr sz="900"/>
+              <a:defRPr sz="1000"/>
             </a:lvl5pPr>
             <a:lvl6pPr marL="2286000" indent="0">
               <a:buNone/>
-              <a:defRPr sz="900"/>
+              <a:defRPr sz="1000"/>
             </a:lvl6pPr>
             <a:lvl7pPr marL="2743200" indent="0">
               <a:buNone/>
-              <a:defRPr sz="900"/>
+              <a:defRPr sz="1000"/>
             </a:lvl7pPr>
             <a:lvl8pPr marL="3200400" indent="0">
               <a:buNone/>
-              <a:defRPr sz="900"/>
+              <a:defRPr sz="1000"/>
             </a:lvl8pPr>
             <a:lvl9pPr marL="3657600" indent="0">
               <a:buNone/>
-              <a:defRPr sz="900"/>
+              <a:defRPr sz="1000"/>
             </a:lvl9pPr>
           </a:lstStyle>
           <a:p>
             <a:pPr lvl="0"/>
             <a:r>
-              <a:rPr lang="en-US"/>
-              <a:t>Click to edit Master text styles</a:t>
+              <a:rPr lang="pt-BR"/>
+              <a:t>Clique para editar o texto mestre</a:t>
             </a:r>
           </a:p>
         </p:txBody>
       </p:sp>
       <p:sp>
         <p:nvSpPr>
-          <p:cNvPr id="5" name="Date Placeholder 4"/>
+          <p:cNvPr id="5" name="Espaço Reservado para Data 4"/>
           <p:cNvSpPr>
             <a:spLocks noGrp="1"/>
           </p:cNvSpPr>
@@ -2510,17 +2858,17 @@
           <a:bodyPr/>
           <a:lstStyle/>
           <a:p>
-            <a:fld id="{5BCAD085-E8A6-8845-BD4E-CB4CCA059FC4}" type="datetimeFigureOut">
-              <a:rPr lang="en-US" smtClean="0"/>
-              <a:t>5/19/2026</a:t>
+            <a:fld id="{F0E51C7C-CEA3-4CAA-BE4B-344879E7C377}" type="datetimeFigureOut">
+              <a:rPr lang="de-DE" smtClean="0"/>
+              <a:t>29.05.2026</a:t>
             </a:fld>
-            <a:endParaRPr lang="en-US"/>
+            <a:endParaRPr lang="de-DE"/>
           </a:p>
         </p:txBody>
       </p:sp>
       <p:sp>
         <p:nvSpPr>
-          <p:cNvPr id="6" name="Footer Placeholder 5"/>
+          <p:cNvPr id="6" name="Espaço Reservado para Rodapé 5"/>
           <p:cNvSpPr>
             <a:spLocks noGrp="1"/>
           </p:cNvSpPr>
@@ -2533,13 +2881,13 @@
           <a:bodyPr/>
           <a:lstStyle/>
           <a:p>
-            <a:endParaRPr lang="en-US"/>
+            <a:endParaRPr lang="de-DE"/>
           </a:p>
         </p:txBody>
       </p:sp>
       <p:sp>
         <p:nvSpPr>
-          <p:cNvPr id="7" name="Slide Number Placeholder 6"/>
+          <p:cNvPr id="7" name="Espaço Reservado para Número de Slide 6"/>
           <p:cNvSpPr>
             <a:spLocks noGrp="1"/>
           </p:cNvSpPr>
@@ -2552,18 +2900,18 @@
           <a:bodyPr/>
           <a:lstStyle/>
           <a:p>
-            <a:fld id="{C1FF6DA9-008F-8B48-92A6-B652298478BF}" type="slidenum">
-              <a:rPr lang="en-US" smtClean="0"/>
+            <a:fld id="{754FE2FE-B55E-4328-8F5C-2CEB8781A47B}" type="slidenum">
+              <a:rPr lang="de-DE" smtClean="0"/>
               <a:t>‹nº›</a:t>
             </a:fld>
-            <a:endParaRPr lang="en-US"/>
+            <a:endParaRPr lang="de-DE"/>
           </a:p>
         </p:txBody>
       </p:sp>
     </p:spTree>
     <p:extLst>
       <p:ext uri="{BB962C8B-B14F-4D97-AF65-F5344CB8AC3E}">
-        <p14:creationId xmlns:p14="http://schemas.microsoft.com/office/powerpoint/2010/main" val="3889236939"/>
+        <p14:creationId xmlns:p14="http://schemas.microsoft.com/office/powerpoint/2010/main" val="2245566346"/>
       </p:ext>
     </p:extLst>
   </p:cSld>
@@ -2597,7 +2945,7 @@
       </p:grpSpPr>
       <p:sp>
         <p:nvSpPr>
-          <p:cNvPr id="2" name="Title Placeholder 1"/>
+          <p:cNvPr id="2" name="Espaço Reservado para Título 1"/>
           <p:cNvSpPr>
             <a:spLocks noGrp="1"/>
           </p:cNvSpPr>
@@ -2607,8 +2955,8 @@
         </p:nvSpPr>
         <p:spPr>
           <a:xfrm>
-            <a:off x="457200" y="274638"/>
-            <a:ext cx="8229600" cy="1143000"/>
+            <a:off x="838200" y="365125"/>
+            <a:ext cx="10515600" cy="1325563"/>
           </a:xfrm>
           <a:prstGeom prst="rect">
             <a:avLst/>
@@ -2621,15 +2969,16 @@
           <a:lstStyle/>
           <a:p>
             <a:r>
-              <a:rPr lang="en-US"/>
-              <a:t>Click to edit Master title style</a:t>
-            </a:r>
+              <a:rPr lang="pt-BR"/>
+              <a:t>Clique para editar o título mestre</a:t>
+            </a:r>
+            <a:endParaRPr lang="de-DE"/>
           </a:p>
         </p:txBody>
       </p:sp>
       <p:sp>
         <p:nvSpPr>
-          <p:cNvPr id="3" name="Text Placeholder 2"/>
+          <p:cNvPr id="3" name="Espaço Reservado para Texto 2"/>
           <p:cNvSpPr>
             <a:spLocks noGrp="1"/>
           </p:cNvSpPr>
@@ -2639,8 +2988,8 @@
         </p:nvSpPr>
         <p:spPr>
           <a:xfrm>
-            <a:off x="457200" y="1600200"/>
-            <a:ext cx="8229600" cy="4525963"/>
+            <a:off x="838200" y="1825625"/>
+            <a:ext cx="10515600" cy="4351338"/>
           </a:xfrm>
           <a:prstGeom prst="rect">
             <a:avLst/>
@@ -2654,43 +3003,44 @@
           <a:p>
             <a:pPr lvl="0"/>
             <a:r>
-              <a:rPr lang="en-US"/>
-              <a:t>Click to edit Master text styles</a:t>
+              <a:rPr lang="pt-BR"/>
+              <a:t>Clique para editar o texto mestre</a:t>
             </a:r>
           </a:p>
           <a:p>
             <a:pPr lvl="1"/>
             <a:r>
-              <a:rPr lang="en-US"/>
-              <a:t>Second level</a:t>
+              <a:rPr lang="pt-BR"/>
+              <a:t>Segundo nível</a:t>
             </a:r>
           </a:p>
           <a:p>
             <a:pPr lvl="2"/>
             <a:r>
-              <a:rPr lang="en-US"/>
-              <a:t>Third level</a:t>
+              <a:rPr lang="pt-BR"/>
+              <a:t>Terceiro nível</a:t>
             </a:r>
           </a:p>
           <a:p>
             <a:pPr lvl="3"/>
             <a:r>
-              <a:rPr lang="en-US"/>
-              <a:t>Fourth level</a:t>
+              <a:rPr lang="pt-BR"/>
+              <a:t>Quarto nível</a:t>
             </a:r>
           </a:p>
           <a:p>
             <a:pPr lvl="4"/>
             <a:r>
-              <a:rPr lang="en-US"/>
-              <a:t>Fifth level</a:t>
-            </a:r>
+              <a:rPr lang="pt-BR"/>
+              <a:t>Quinto nível</a:t>
+            </a:r>
+            <a:endParaRPr lang="de-DE"/>
           </a:p>
         </p:txBody>
       </p:sp>
       <p:sp>
         <p:nvSpPr>
-          <p:cNvPr id="4" name="Date Placeholder 3"/>
+          <p:cNvPr id="4" name="Espaço Reservado para Data 3"/>
           <p:cNvSpPr>
             <a:spLocks noGrp="1"/>
           </p:cNvSpPr>
@@ -2700,8 +3050,8 @@
         </p:nvSpPr>
         <p:spPr>
           <a:xfrm>
-            <a:off x="457200" y="6356350"/>
-            <a:ext cx="2133600" cy="365125"/>
+            <a:off x="838200" y="6356350"/>
+            <a:ext cx="2743200" cy="365125"/>
           </a:xfrm>
           <a:prstGeom prst="rect">
             <a:avLst/>
@@ -2714,24 +3064,24 @@
               <a:defRPr sz="1200">
                 <a:solidFill>
                   <a:schemeClr val="tx1">
-                    <a:tint val="75000"/>
+                    <a:tint val="82000"/>
                   </a:schemeClr>
                 </a:solidFill>
               </a:defRPr>
             </a:lvl1pPr>
           </a:lstStyle>
           <a:p>
-            <a:fld id="{5BCAD085-E8A6-8845-BD4E-CB4CCA059FC4}" type="datetimeFigureOut">
-              <a:rPr lang="en-US" smtClean="0"/>
-              <a:t>5/19/2026</a:t>
+            <a:fld id="{F0E51C7C-CEA3-4CAA-BE4B-344879E7C377}" type="datetimeFigureOut">
+              <a:rPr lang="de-DE" smtClean="0"/>
+              <a:t>29.05.2026</a:t>
             </a:fld>
-            <a:endParaRPr lang="en-US"/>
+            <a:endParaRPr lang="de-DE"/>
           </a:p>
         </p:txBody>
       </p:sp>
       <p:sp>
         <p:nvSpPr>
-          <p:cNvPr id="5" name="Footer Placeholder 4"/>
+          <p:cNvPr id="5" name="Espaço Reservado para Rodapé 4"/>
           <p:cNvSpPr>
             <a:spLocks noGrp="1"/>
           </p:cNvSpPr>
@@ -2741,8 +3091,8 @@
         </p:nvSpPr>
         <p:spPr>
           <a:xfrm>
-            <a:off x="3124200" y="6356350"/>
-            <a:ext cx="2895600" cy="365125"/>
+            <a:off x="4038600" y="6356350"/>
+            <a:ext cx="4114800" cy="365125"/>
           </a:xfrm>
           <a:prstGeom prst="rect">
             <a:avLst/>
@@ -2755,20 +3105,20 @@
               <a:defRPr sz="1200">
                 <a:solidFill>
                   <a:schemeClr val="tx1">
-                    <a:tint val="75000"/>
+                    <a:tint val="82000"/>
                   </a:schemeClr>
                 </a:solidFill>
               </a:defRPr>
             </a:lvl1pPr>
           </a:lstStyle>
           <a:p>
-            <a:endParaRPr lang="en-US"/>
+            <a:endParaRPr lang="de-DE"/>
           </a:p>
         </p:txBody>
       </p:sp>
       <p:sp>
         <p:nvSpPr>
-          <p:cNvPr id="6" name="Slide Number Placeholder 5"/>
+          <p:cNvPr id="6" name="Espaço Reservado para Número de Slide 5"/>
           <p:cNvSpPr>
             <a:spLocks noGrp="1"/>
           </p:cNvSpPr>
@@ -2778,8 +3128,8 @@
         </p:nvSpPr>
         <p:spPr>
           <a:xfrm>
-            <a:off x="6553200" y="6356350"/>
-            <a:ext cx="2133600" cy="365125"/>
+            <a:off x="8610600" y="6356350"/>
+            <a:ext cx="2743200" cy="365125"/>
           </a:xfrm>
           <a:prstGeom prst="rect">
             <a:avLst/>
@@ -2792,25 +3142,25 @@
               <a:defRPr sz="1200">
                 <a:solidFill>
                   <a:schemeClr val="tx1">
-                    <a:tint val="75000"/>
+                    <a:tint val="82000"/>
                   </a:schemeClr>
                 </a:solidFill>
               </a:defRPr>
             </a:lvl1pPr>
           </a:lstStyle>
           <a:p>
-            <a:fld id="{C1FF6DA9-008F-8B48-92A6-B652298478BF}" type="slidenum">
-              <a:rPr lang="en-US" smtClean="0"/>
+            <a:fld id="{754FE2FE-B55E-4328-8F5C-2CEB8781A47B}" type="slidenum">
+              <a:rPr lang="de-DE" smtClean="0"/>
               <a:t>‹nº›</a:t>
             </a:fld>
-            <a:endParaRPr lang="en-US"/>
+            <a:endParaRPr lang="de-DE"/>
           </a:p>
         </p:txBody>
       </p:sp>
     </p:spTree>
     <p:extLst>
       <p:ext uri="{BB962C8B-B14F-4D97-AF65-F5344CB8AC3E}">
-        <p14:creationId xmlns:p14="http://schemas.microsoft.com/office/powerpoint/2010/main" val="2209977519"/>
+        <p14:creationId xmlns:p14="http://schemas.microsoft.com/office/powerpoint/2010/main" val="2675746937"/>
       </p:ext>
     </p:extLst>
   </p:cSld>
@@ -2830,7 +3180,10 @@
   </p:sldLayoutIdLst>
   <p:txStyles>
     <p:titleStyle>
-      <a:lvl1pPr algn="ctr" defTabSz="457200" rtl="0" eaLnBrk="1" latinLnBrk="0" hangingPunct="1">
+      <a:lvl1pPr algn="l" defTabSz="914400" rtl="0" eaLnBrk="1" latinLnBrk="0" hangingPunct="1">
+        <a:lnSpc>
+          <a:spcPct val="90000"/>
+        </a:lnSpc>
         <a:spcBef>
           <a:spcPct val="0"/>
         </a:spcBef>
@@ -2846,13 +3199,16 @@
       </a:lvl1pPr>
     </p:titleStyle>
     <p:bodyStyle>
-      <a:lvl1pPr marL="342900" indent="-342900" algn="l" defTabSz="457200" rtl="0" eaLnBrk="1" latinLnBrk="0" hangingPunct="1">
+      <a:lvl1pPr marL="228600" indent="-228600" algn="l" defTabSz="914400" rtl="0" eaLnBrk="1" latinLnBrk="0" hangingPunct="1">
+        <a:lnSpc>
+          <a:spcPct val="90000"/>
+        </a:lnSpc>
         <a:spcBef>
-          <a:spcPct val="20000"/>
+          <a:spcPts val="1000"/>
         </a:spcBef>
-        <a:buFont typeface="Arial"/>
+        <a:buFont typeface="Arial" panose="020B0604020202020204" pitchFamily="34" charset="0"/>
         <a:buChar char="•"/>
-        <a:defRPr sz="3200" kern="1200">
+        <a:defRPr sz="2800" kern="1200">
           <a:solidFill>
             <a:schemeClr val="tx1"/>
           </a:solidFill>
@@ -2861,26 +3217,14 @@
           <a:cs typeface="+mn-cs"/>
         </a:defRPr>
       </a:lvl1pPr>
-      <a:lvl2pPr marL="742950" indent="-285750" algn="l" defTabSz="457200" rtl="0" eaLnBrk="1" latinLnBrk="0" hangingPunct="1">
+      <a:lvl2pPr marL="685800" indent="-228600" algn="l" defTabSz="914400" rtl="0" eaLnBrk="1" latinLnBrk="0" hangingPunct="1">
+        <a:lnSpc>
+          <a:spcPct val="90000"/>
+        </a:lnSpc>
         <a:spcBef>
-          <a:spcPct val="20000"/>
+          <a:spcPts val="500"/>
         </a:spcBef>
-        <a:buFont typeface="Arial"/>
-        <a:buChar char="–"/>
-        <a:defRPr sz="2800" kern="1200">
-          <a:solidFill>
-            <a:schemeClr val="tx1"/>
-          </a:solidFill>
-          <a:latin typeface="+mn-lt"/>
-          <a:ea typeface="+mn-ea"/>
-          <a:cs typeface="+mn-cs"/>
-        </a:defRPr>
-      </a:lvl2pPr>
-      <a:lvl3pPr marL="1143000" indent="-228600" algn="l" defTabSz="457200" rtl="0" eaLnBrk="1" latinLnBrk="0" hangingPunct="1">
-        <a:spcBef>
-          <a:spcPct val="20000"/>
-        </a:spcBef>
-        <a:buFont typeface="Arial"/>
+        <a:buFont typeface="Arial" panose="020B0604020202020204" pitchFamily="34" charset="0"/>
         <a:buChar char="•"/>
         <a:defRPr sz="2400" kern="1200">
           <a:solidFill>
@@ -2890,42 +3234,15 @@
           <a:ea typeface="+mn-ea"/>
           <a:cs typeface="+mn-cs"/>
         </a:defRPr>
-      </a:lvl3pPr>
-      <a:lvl4pPr marL="1600200" indent="-228600" algn="l" defTabSz="457200" rtl="0" eaLnBrk="1" latinLnBrk="0" hangingPunct="1">
+      </a:lvl2pPr>
+      <a:lvl3pPr marL="1143000" indent="-228600" algn="l" defTabSz="914400" rtl="0" eaLnBrk="1" latinLnBrk="0" hangingPunct="1">
+        <a:lnSpc>
+          <a:spcPct val="90000"/>
+        </a:lnSpc>
         <a:spcBef>
-          <a:spcPct val="20000"/>
+          <a:spcPts val="500"/>
         </a:spcBef>
-        <a:buFont typeface="Arial"/>
-        <a:buChar char="–"/>
-        <a:defRPr sz="2000" kern="1200">
-          <a:solidFill>
-            <a:schemeClr val="tx1"/>
-          </a:solidFill>
-          <a:latin typeface="+mn-lt"/>
-          <a:ea typeface="+mn-ea"/>
-          <a:cs typeface="+mn-cs"/>
-        </a:defRPr>
-      </a:lvl4pPr>
-      <a:lvl5pPr marL="2057400" indent="-228600" algn="l" defTabSz="457200" rtl="0" eaLnBrk="1" latinLnBrk="0" hangingPunct="1">
-        <a:spcBef>
-          <a:spcPct val="20000"/>
-        </a:spcBef>
-        <a:buFont typeface="Arial"/>
-        <a:buChar char="»"/>
-        <a:defRPr sz="2000" kern="1200">
-          <a:solidFill>
-            <a:schemeClr val="tx1"/>
-          </a:solidFill>
-          <a:latin typeface="+mn-lt"/>
-          <a:ea typeface="+mn-ea"/>
-          <a:cs typeface="+mn-cs"/>
-        </a:defRPr>
-      </a:lvl5pPr>
-      <a:lvl6pPr marL="2514600" indent="-228600" algn="l" defTabSz="457200" rtl="0" eaLnBrk="1" latinLnBrk="0" hangingPunct="1">
-        <a:spcBef>
-          <a:spcPct val="20000"/>
-        </a:spcBef>
-        <a:buFont typeface="Arial"/>
+        <a:buFont typeface="Arial" panose="020B0604020202020204" pitchFamily="34" charset="0"/>
         <a:buChar char="•"/>
         <a:defRPr sz="2000" kern="1200">
           <a:solidFill>
@@ -2935,14 +3252,71 @@
           <a:ea typeface="+mn-ea"/>
           <a:cs typeface="+mn-cs"/>
         </a:defRPr>
+      </a:lvl3pPr>
+      <a:lvl4pPr marL="1600200" indent="-228600" algn="l" defTabSz="914400" rtl="0" eaLnBrk="1" latinLnBrk="0" hangingPunct="1">
+        <a:lnSpc>
+          <a:spcPct val="90000"/>
+        </a:lnSpc>
+        <a:spcBef>
+          <a:spcPts val="500"/>
+        </a:spcBef>
+        <a:buFont typeface="Arial" panose="020B0604020202020204" pitchFamily="34" charset="0"/>
+        <a:buChar char="•"/>
+        <a:defRPr sz="1800" kern="1200">
+          <a:solidFill>
+            <a:schemeClr val="tx1"/>
+          </a:solidFill>
+          <a:latin typeface="+mn-lt"/>
+          <a:ea typeface="+mn-ea"/>
+          <a:cs typeface="+mn-cs"/>
+        </a:defRPr>
+      </a:lvl4pPr>
+      <a:lvl5pPr marL="2057400" indent="-228600" algn="l" defTabSz="914400" rtl="0" eaLnBrk="1" latinLnBrk="0" hangingPunct="1">
+        <a:lnSpc>
+          <a:spcPct val="90000"/>
+        </a:lnSpc>
+        <a:spcBef>
+          <a:spcPts val="500"/>
+        </a:spcBef>
+        <a:buFont typeface="Arial" panose="020B0604020202020204" pitchFamily="34" charset="0"/>
+        <a:buChar char="•"/>
+        <a:defRPr sz="1800" kern="1200">
+          <a:solidFill>
+            <a:schemeClr val="tx1"/>
+          </a:solidFill>
+          <a:latin typeface="+mn-lt"/>
+          <a:ea typeface="+mn-ea"/>
+          <a:cs typeface="+mn-cs"/>
+        </a:defRPr>
+      </a:lvl5pPr>
+      <a:lvl6pPr marL="2514600" indent="-228600" algn="l" defTabSz="914400" rtl="0" eaLnBrk="1" latinLnBrk="0" hangingPunct="1">
+        <a:lnSpc>
+          <a:spcPct val="90000"/>
+        </a:lnSpc>
+        <a:spcBef>
+          <a:spcPts val="500"/>
+        </a:spcBef>
+        <a:buFont typeface="Arial" panose="020B0604020202020204" pitchFamily="34" charset="0"/>
+        <a:buChar char="•"/>
+        <a:defRPr sz="1800" kern="1200">
+          <a:solidFill>
+            <a:schemeClr val="tx1"/>
+          </a:solidFill>
+          <a:latin typeface="+mn-lt"/>
+          <a:ea typeface="+mn-ea"/>
+          <a:cs typeface="+mn-cs"/>
+        </a:defRPr>
       </a:lvl6pPr>
-      <a:lvl7pPr marL="2971800" indent="-228600" algn="l" defTabSz="457200" rtl="0" eaLnBrk="1" latinLnBrk="0" hangingPunct="1">
+      <a:lvl7pPr marL="2971800" indent="-228600" algn="l" defTabSz="914400" rtl="0" eaLnBrk="1" latinLnBrk="0" hangingPunct="1">
+        <a:lnSpc>
+          <a:spcPct val="90000"/>
+        </a:lnSpc>
         <a:spcBef>
-          <a:spcPct val="20000"/>
+          <a:spcPts val="500"/>
         </a:spcBef>
-        <a:buFont typeface="Arial"/>
+        <a:buFont typeface="Arial" panose="020B0604020202020204" pitchFamily="34" charset="0"/>
         <a:buChar char="•"/>
-        <a:defRPr sz="2000" kern="1200">
+        <a:defRPr sz="1800" kern="1200">
           <a:solidFill>
             <a:schemeClr val="tx1"/>
           </a:solidFill>
@@ -2951,13 +3325,16 @@
           <a:cs typeface="+mn-cs"/>
         </a:defRPr>
       </a:lvl7pPr>
-      <a:lvl8pPr marL="3429000" indent="-228600" algn="l" defTabSz="457200" rtl="0" eaLnBrk="1" latinLnBrk="0" hangingPunct="1">
+      <a:lvl8pPr marL="3429000" indent="-228600" algn="l" defTabSz="914400" rtl="0" eaLnBrk="1" latinLnBrk="0" hangingPunct="1">
+        <a:lnSpc>
+          <a:spcPct val="90000"/>
+        </a:lnSpc>
         <a:spcBef>
-          <a:spcPct val="20000"/>
+          <a:spcPts val="500"/>
         </a:spcBef>
-        <a:buFont typeface="Arial"/>
+        <a:buFont typeface="Arial" panose="020B0604020202020204" pitchFamily="34" charset="0"/>
         <a:buChar char="•"/>
-        <a:defRPr sz="2000" kern="1200">
+        <a:defRPr sz="1800" kern="1200">
           <a:solidFill>
             <a:schemeClr val="tx1"/>
           </a:solidFill>
@@ -2966,13 +3343,16 @@
           <a:cs typeface="+mn-cs"/>
         </a:defRPr>
       </a:lvl8pPr>
-      <a:lvl9pPr marL="3886200" indent="-228600" algn="l" defTabSz="457200" rtl="0" eaLnBrk="1" latinLnBrk="0" hangingPunct="1">
+      <a:lvl9pPr marL="3886200" indent="-228600" algn="l" defTabSz="914400" rtl="0" eaLnBrk="1" latinLnBrk="0" hangingPunct="1">
+        <a:lnSpc>
+          <a:spcPct val="90000"/>
+        </a:lnSpc>
         <a:spcBef>
-          <a:spcPct val="20000"/>
+          <a:spcPts val="500"/>
         </a:spcBef>
-        <a:buFont typeface="Arial"/>
+        <a:buFont typeface="Arial" panose="020B0604020202020204" pitchFamily="34" charset="0"/>
         <a:buChar char="•"/>
-        <a:defRPr sz="2000" kern="1200">
+        <a:defRPr sz="1800" kern="1200">
           <a:solidFill>
             <a:schemeClr val="tx1"/>
           </a:solidFill>
@@ -2984,9 +3364,9 @@
     </p:bodyStyle>
     <p:otherStyle>
       <a:defPPr>
-        <a:defRPr lang="en-US"/>
+        <a:defRPr lang="de-DE"/>
       </a:defPPr>
-      <a:lvl1pPr marL="0" algn="l" defTabSz="457200" rtl="0" eaLnBrk="1" latinLnBrk="0" hangingPunct="1">
+      <a:lvl1pPr marL="0" algn="l" defTabSz="914400" rtl="0" eaLnBrk="1" latinLnBrk="0" hangingPunct="1">
         <a:defRPr sz="1800" kern="1200">
           <a:solidFill>
             <a:schemeClr val="tx1"/>
@@ -2996,7 +3376,7 @@
           <a:cs typeface="+mn-cs"/>
         </a:defRPr>
       </a:lvl1pPr>
-      <a:lvl2pPr marL="457200" algn="l" defTabSz="457200" rtl="0" eaLnBrk="1" latinLnBrk="0" hangingPunct="1">
+      <a:lvl2pPr marL="457200" algn="l" defTabSz="914400" rtl="0" eaLnBrk="1" latinLnBrk="0" hangingPunct="1">
         <a:defRPr sz="1800" kern="1200">
           <a:solidFill>
             <a:schemeClr val="tx1"/>
@@ -3006,7 +3386,7 @@
           <a:cs typeface="+mn-cs"/>
         </a:defRPr>
       </a:lvl2pPr>
-      <a:lvl3pPr marL="914400" algn="l" defTabSz="457200" rtl="0" eaLnBrk="1" latinLnBrk="0" hangingPunct="1">
+      <a:lvl3pPr marL="914400" algn="l" defTabSz="914400" rtl="0" eaLnBrk="1" latinLnBrk="0" hangingPunct="1">
         <a:defRPr sz="1800" kern="1200">
           <a:solidFill>
             <a:schemeClr val="tx1"/>
@@ -3016,7 +3396,7 @@
           <a:cs typeface="+mn-cs"/>
         </a:defRPr>
       </a:lvl3pPr>
-      <a:lvl4pPr marL="1371600" algn="l" defTabSz="457200" rtl="0" eaLnBrk="1" latinLnBrk="0" hangingPunct="1">
+      <a:lvl4pPr marL="1371600" algn="l" defTabSz="914400" rtl="0" eaLnBrk="1" latinLnBrk="0" hangingPunct="1">
         <a:defRPr sz="1800" kern="1200">
           <a:solidFill>
             <a:schemeClr val="tx1"/>
@@ -3026,7 +3406,7 @@
           <a:cs typeface="+mn-cs"/>
         </a:defRPr>
       </a:lvl4pPr>
-      <a:lvl5pPr marL="1828800" algn="l" defTabSz="457200" rtl="0" eaLnBrk="1" latinLnBrk="0" hangingPunct="1">
+      <a:lvl5pPr marL="1828800" algn="l" defTabSz="914400" rtl="0" eaLnBrk="1" latinLnBrk="0" hangingPunct="1">
         <a:defRPr sz="1800" kern="1200">
           <a:solidFill>
             <a:schemeClr val="tx1"/>
@@ -3036,7 +3416,7 @@
           <a:cs typeface="+mn-cs"/>
         </a:defRPr>
       </a:lvl5pPr>
-      <a:lvl6pPr marL="2286000" algn="l" defTabSz="457200" rtl="0" eaLnBrk="1" latinLnBrk="0" hangingPunct="1">
+      <a:lvl6pPr marL="2286000" algn="l" defTabSz="914400" rtl="0" eaLnBrk="1" latinLnBrk="0" hangingPunct="1">
         <a:defRPr sz="1800" kern="1200">
           <a:solidFill>
             <a:schemeClr val="tx1"/>
@@ -3046,7 +3426,7 @@
           <a:cs typeface="+mn-cs"/>
         </a:defRPr>
       </a:lvl6pPr>
-      <a:lvl7pPr marL="2743200" algn="l" defTabSz="457200" rtl="0" eaLnBrk="1" latinLnBrk="0" hangingPunct="1">
+      <a:lvl7pPr marL="2743200" algn="l" defTabSz="914400" rtl="0" eaLnBrk="1" latinLnBrk="0" hangingPunct="1">
         <a:defRPr sz="1800" kern="1200">
           <a:solidFill>
             <a:schemeClr val="tx1"/>
@@ -3056,7 +3436,7 @@
           <a:cs typeface="+mn-cs"/>
         </a:defRPr>
       </a:lvl7pPr>
-      <a:lvl8pPr marL="3200400" algn="l" defTabSz="457200" rtl="0" eaLnBrk="1" latinLnBrk="0" hangingPunct="1">
+      <a:lvl8pPr marL="3200400" algn="l" defTabSz="914400" rtl="0" eaLnBrk="1" latinLnBrk="0" hangingPunct="1">
         <a:defRPr sz="1800" kern="1200">
           <a:solidFill>
             <a:schemeClr val="tx1"/>
@@ -3066,7 +3446,7 @@
           <a:cs typeface="+mn-cs"/>
         </a:defRPr>
       </a:lvl8pPr>
-      <a:lvl9pPr marL="3657600" algn="l" defTabSz="457200" rtl="0" eaLnBrk="1" latinLnBrk="0" hangingPunct="1">
+      <a:lvl9pPr marL="3657600" algn="l" defTabSz="914400" rtl="0" eaLnBrk="1" latinLnBrk="0" hangingPunct="1">
         <a:defRPr sz="1800" kern="1200">
           <a:solidFill>
             <a:schemeClr val="tx1"/>
@@ -3113,7 +3493,7 @@
           <p:nvPr/>
         </p:nvPicPr>
         <p:blipFill>
-          <a:blip r:embed="rId2"/>
+          <a:blip r:embed="rId3"/>
           <a:stretch>
             <a:fillRect/>
           </a:stretch>
@@ -9288,7 +9668,7 @@
           <a:noFill/>
         </p:spPr>
         <p:txBody>
-          <a:bodyPr wrap="square" rtlCol="0">
+          <a:bodyPr wrap="square" lIns="91440" tIns="45720" rIns="91440" bIns="45720" rtlCol="0" anchor="t">
             <a:spAutoFit/>
           </a:bodyPr>
           <a:lstStyle/>
@@ -9329,25 +9709,21 @@
             </a:r>
           </a:p>
           <a:p>
-            <a:pPr marL="0" marR="0" lvl="0" indent="0" algn="ctr" defTabSz="914400" rtl="0" eaLnBrk="1" fontAlgn="auto" latinLnBrk="0" hangingPunct="1">
-              <a:lnSpc>
-                <a:spcPct val="100000"/>
-              </a:lnSpc>
-              <a:spcBef>
-                <a:spcPts val="0"/>
-              </a:spcBef>
-              <a:spcAft>
-                <a:spcPts val="0"/>
-              </a:spcAft>
-              <a:buClrTx/>
-              <a:buSzTx/>
-              <a:buFontTx/>
-              <a:buNone/>
-              <a:tabLst/>
+            <a:pPr algn="ctr">
               <a:defRPr/>
             </a:pPr>
             <a:r>
-              <a:rPr kumimoji="0" lang="en-US" sz="1200" b="0" i="0" u="none" strike="noStrike" kern="1200" cap="none" spc="0" normalizeH="0" baseline="0" noProof="0">
+              <a:rPr lang="en-US" sz="1200" dirty="0">
+                <a:solidFill>
+                  <a:prstClr val="black"/>
+                </a:solidFill>
+                <a:latin typeface="Poppins"/>
+                <a:cs typeface="Poppins"/>
+              </a:rPr>
+              <a:t>Azul claro e</a:t>
+            </a:r>
+            <a:r>
+              <a:rPr kumimoji="0" lang="en-US" sz="1200" b="0" i="0" u="none" strike="noStrike" kern="1200" cap="none" spc="0" normalizeH="0" baseline="0" noProof="0" dirty="0">
                 <a:ln>
                   <a:noFill/>
                 </a:ln>
@@ -9357,13 +9733,44 @@
                 <a:effectLst/>
                 <a:uLnTx/>
                 <a:uFillTx/>
-                <a:latin typeface="Poppins" panose="00000500000000000000" pitchFamily="2" charset="0"/>
-                <a:ea typeface="+mn-ea"/>
-                <a:cs typeface="Poppins" panose="00000500000000000000" pitchFamily="2" charset="0"/>
+                <a:latin typeface="Poppins"/>
+                <a:cs typeface="Poppins"/>
               </a:rPr>
-              <a:t>Verde escuro e verde claro</a:t>
-            </a:r>
-            <a:endParaRPr kumimoji="0" lang="pt-BR" sz="1400" b="0" i="0" u="none" strike="noStrike" kern="1200" cap="none" spc="0" normalizeH="0" baseline="0" noProof="0">
+              <a:t> </a:t>
+            </a:r>
+            <a:r>
+              <a:rPr kumimoji="0" lang="en-US" sz="1200" b="0" i="0" u="none" strike="noStrike" kern="1200" cap="none" spc="0" normalizeH="0" baseline="0" noProof="0" dirty="0" err="1">
+                <a:ln>
+                  <a:noFill/>
+                </a:ln>
+                <a:solidFill>
+                  <a:prstClr val="black"/>
+                </a:solidFill>
+                <a:effectLst/>
+                <a:uLnTx/>
+                <a:uFillTx/>
+                <a:latin typeface="Poppins"/>
+                <a:cs typeface="Poppins"/>
+              </a:rPr>
+              <a:t>verde</a:t>
+            </a:r>
+            <a:r>
+              <a:rPr kumimoji="0" lang="en-US" sz="1200" b="0" i="0" u="none" strike="noStrike" kern="1200" cap="none" spc="0" normalizeH="0" baseline="0" noProof="0" dirty="0">
+                <a:ln>
+                  <a:noFill/>
+                </a:ln>
+                <a:solidFill>
+                  <a:prstClr val="black"/>
+                </a:solidFill>
+                <a:effectLst/>
+                <a:uLnTx/>
+                <a:uFillTx/>
+                <a:latin typeface="Poppins"/>
+                <a:cs typeface="Poppins"/>
+              </a:rPr>
+              <a:t> claro</a:t>
+            </a:r>
+            <a:endParaRPr kumimoji="0" lang="pt-BR" sz="1400" b="0" i="0" u="none" strike="noStrike" kern="1200" cap="none" spc="0" normalizeH="0" baseline="0" noProof="0" dirty="0">
               <a:ln>
                 <a:noFill/>
               </a:ln>
@@ -9373,9 +9780,8 @@
               <a:effectLst/>
               <a:uLnTx/>
               <a:uFillTx/>
-              <a:latin typeface="Poppins" panose="00000500000000000000" pitchFamily="2" charset="0"/>
-              <a:ea typeface="+mn-ea"/>
-              <a:cs typeface="Poppins" panose="00000500000000000000" pitchFamily="2" charset="0"/>
+              <a:latin typeface="Poppins"/>
+              <a:cs typeface="Poppins"/>
             </a:endParaRPr>
           </a:p>
         </p:txBody>
@@ -10108,7 +10514,7 @@
           <p:nvPr/>
         </p:nvPicPr>
         <p:blipFill>
-          <a:blip r:embed="rId2"/>
+          <a:blip r:embed="rId3"/>
           <a:stretch>
             <a:fillRect/>
           </a:stretch>
@@ -10527,8 +10933,8 @@
         </p:nvSpPr>
         <p:spPr>
           <a:xfrm>
-            <a:off x="2057632" y="250818"/>
-            <a:ext cx="6482589" cy="584775"/>
+            <a:off x="2072005" y="322704"/>
+            <a:ext cx="4240306" cy="584775"/>
           </a:xfrm>
           <a:prstGeom prst="rect">
             <a:avLst/>
@@ -11799,6 +12205,11 @@
         </p:txBody>
       </p:sp>
     </p:spTree>
+    <p:extLst>
+      <p:ext uri="{BB962C8B-B14F-4D97-AF65-F5344CB8AC3E}">
+        <p14:creationId xmlns:p14="http://schemas.microsoft.com/office/powerpoint/2010/main" val="2503685601"/>
+      </p:ext>
+    </p:extLst>
   </p:cSld>
   <p:clrMapOvr>
     <a:masterClrMapping/>
@@ -11807,7 +12218,7 @@
 </file>
 
 <file path=ppt/theme/theme1.xml><?xml version="1.0" encoding="utf-8"?>
-<a:theme xmlns:a="http://schemas.openxmlformats.org/drawingml/2006/main" name="Office Theme">
+<a:theme xmlns:a="http://schemas.openxmlformats.org/drawingml/2006/main" name="Tema do Office">
   <a:themeElements>
     <a:clrScheme name="Office">
       <a:dk1>
@@ -11817,39 +12228,39 @@
         <a:sysClr val="window" lastClr="FFFFFF"/>
       </a:lt1>
       <a:dk2>
-        <a:srgbClr val="1F497D"/>
+        <a:srgbClr val="0E2841"/>
       </a:dk2>
       <a:lt2>
-        <a:srgbClr val="EEECE1"/>
+        <a:srgbClr val="E8E8E8"/>
       </a:lt2>
       <a:accent1>
-        <a:srgbClr val="4F81BD"/>
+        <a:srgbClr val="156082"/>
       </a:accent1>
       <a:accent2>
-        <a:srgbClr val="C0504D"/>
+        <a:srgbClr val="E97132"/>
       </a:accent2>
       <a:accent3>
-        <a:srgbClr val="9BBB59"/>
+        <a:srgbClr val="196B24"/>
       </a:accent3>
       <a:accent4>
-        <a:srgbClr val="8064A2"/>
+        <a:srgbClr val="0F9ED5"/>
       </a:accent4>
       <a:accent5>
-        <a:srgbClr val="4BACC6"/>
+        <a:srgbClr val="A02B93"/>
       </a:accent5>
       <a:accent6>
-        <a:srgbClr val="F79646"/>
+        <a:srgbClr val="4EA72E"/>
       </a:accent6>
       <a:hlink>
-        <a:srgbClr val="0000FF"/>
+        <a:srgbClr val="467886"/>
       </a:hlink>
       <a:folHlink>
-        <a:srgbClr val="800080"/>
+        <a:srgbClr val="96607D"/>
       </a:folHlink>
     </a:clrScheme>
-    <a:fontScheme name="Office">
+    <a:fontScheme name="Escritório">
       <a:majorFont>
-        <a:latin typeface="Calibri"/>
+        <a:latin typeface="Aptos Display" panose="020F0302020204030204"/>
         <a:ea typeface=""/>
         <a:cs typeface=""/>
         <a:font script="Jpan" typeface="ＭＳ Ｐゴシック"/>
@@ -11884,7 +12295,7 @@
         <a:font script="Geor" typeface="Sylfaen"/>
       </a:majorFont>
       <a:minorFont>
-        <a:latin typeface="Calibri"/>
+        <a:latin typeface="Aptos" panose="020B0004020202020204"/>
         <a:ea typeface=""/>
         <a:cs typeface=""/>
         <a:font script="Jpan" typeface="ＭＳ Ｐゴシック"/>
@@ -11919,7 +12330,7 @@
         <a:font script="Geor" typeface="Sylfaen"/>
       </a:minorFont>
     </a:fontScheme>
-    <a:fmtScheme name="Office">
+    <a:fmtScheme name="Escritório">
       <a:fillStyleLst>
         <a:solidFill>
           <a:schemeClr val="phClr"/>
@@ -11928,180 +12339,136 @@
           <a:gsLst>
             <a:gs pos="0">
               <a:schemeClr val="phClr">
-                <a:tint val="50000"/>
-                <a:satMod val="300000"/>
+                <a:lumMod val="110000"/>
+                <a:satMod val="105000"/>
+                <a:tint val="67000"/>
               </a:schemeClr>
             </a:gs>
-            <a:gs pos="35000">
+            <a:gs pos="50000">
               <a:schemeClr val="phClr">
-                <a:tint val="37000"/>
-                <a:satMod val="300000"/>
+                <a:lumMod val="105000"/>
+                <a:satMod val="103000"/>
+                <a:tint val="73000"/>
               </a:schemeClr>
             </a:gs>
             <a:gs pos="100000">
               <a:schemeClr val="phClr">
-                <a:tint val="15000"/>
-                <a:satMod val="350000"/>
+                <a:lumMod val="105000"/>
+                <a:satMod val="109000"/>
+                <a:tint val="81000"/>
               </a:schemeClr>
             </a:gs>
           </a:gsLst>
-          <a:lin ang="16200000" scaled="1"/>
+          <a:lin ang="5400000" scaled="0"/>
         </a:gradFill>
         <a:gradFill rotWithShape="1">
           <a:gsLst>
             <a:gs pos="0">
               <a:schemeClr val="phClr">
-                <a:tint val="100000"/>
+                <a:satMod val="103000"/>
+                <a:lumMod val="102000"/>
+                <a:tint val="94000"/>
+              </a:schemeClr>
+            </a:gs>
+            <a:gs pos="50000">
+              <a:schemeClr val="phClr">
+                <a:satMod val="110000"/>
+                <a:lumMod val="100000"/>
                 <a:shade val="100000"/>
-                <a:satMod val="130000"/>
               </a:schemeClr>
             </a:gs>
             <a:gs pos="100000">
               <a:schemeClr val="phClr">
-                <a:tint val="50000"/>
-                <a:shade val="100000"/>
-                <a:satMod val="350000"/>
+                <a:lumMod val="99000"/>
+                <a:satMod val="120000"/>
+                <a:shade val="78000"/>
               </a:schemeClr>
             </a:gs>
           </a:gsLst>
-          <a:lin ang="16200000" scaled="0"/>
+          <a:lin ang="5400000" scaled="0"/>
         </a:gradFill>
       </a:fillStyleLst>
       <a:lnStyleLst>
-        <a:ln w="9525" cap="flat" cmpd="sng" algn="ctr">
+        <a:ln w="12700" cap="flat" cmpd="sng" algn="ctr">
           <a:solidFill>
-            <a:schemeClr val="phClr">
-              <a:shade val="95000"/>
-              <a:satMod val="105000"/>
-            </a:schemeClr>
+            <a:schemeClr val="phClr"/>
           </a:solidFill>
           <a:prstDash val="solid"/>
+          <a:miter lim="800000"/>
+        </a:ln>
+        <a:ln w="19050" cap="flat" cmpd="sng" algn="ctr">
+          <a:solidFill>
+            <a:schemeClr val="phClr"/>
+          </a:solidFill>
+          <a:prstDash val="solid"/>
+          <a:miter lim="800000"/>
         </a:ln>
         <a:ln w="25400" cap="flat" cmpd="sng" algn="ctr">
           <a:solidFill>
             <a:schemeClr val="phClr"/>
           </a:solidFill>
           <a:prstDash val="solid"/>
-        </a:ln>
-        <a:ln w="38100" cap="flat" cmpd="sng" algn="ctr">
-          <a:solidFill>
-            <a:schemeClr val="phClr"/>
-          </a:solidFill>
-          <a:prstDash val="solid"/>
+          <a:miter lim="800000"/>
         </a:ln>
       </a:lnStyleLst>
       <a:effectStyleLst>
         <a:effectStyle>
+          <a:effectLst/>
+        </a:effectStyle>
+        <a:effectStyle>
+          <a:effectLst/>
+        </a:effectStyle>
+        <a:effectStyle>
           <a:effectLst>
-            <a:outerShdw blurRad="40000" dist="20000" dir="5400000" rotWithShape="0">
+            <a:outerShdw blurRad="57150" dist="19050" dir="5400000" algn="ctr" rotWithShape="0">
               <a:srgbClr val="000000">
-                <a:alpha val="38000"/>
+                <a:alpha val="63000"/>
               </a:srgbClr>
             </a:outerShdw>
           </a:effectLst>
-        </a:effectStyle>
-        <a:effectStyle>
-          <a:effectLst>
-            <a:outerShdw blurRad="40000" dist="23000" dir="5400000" rotWithShape="0">
-              <a:srgbClr val="000000">
-                <a:alpha val="35000"/>
-              </a:srgbClr>
-            </a:outerShdw>
-          </a:effectLst>
-        </a:effectStyle>
-        <a:effectStyle>
-          <a:effectLst>
-            <a:outerShdw blurRad="40000" dist="23000" dir="5400000" rotWithShape="0">
-              <a:srgbClr val="000000">
-                <a:alpha val="35000"/>
-              </a:srgbClr>
-            </a:outerShdw>
-          </a:effectLst>
-          <a:scene3d>
-            <a:camera prst="orthographicFront">
-              <a:rot lat="0" lon="0" rev="0"/>
-            </a:camera>
-            <a:lightRig rig="threePt" dir="t">
-              <a:rot lat="0" lon="0" rev="1200000"/>
-            </a:lightRig>
-          </a:scene3d>
-          <a:sp3d>
-            <a:bevelT w="63500" h="25400"/>
-          </a:sp3d>
         </a:effectStyle>
       </a:effectStyleLst>
       <a:bgFillStyleLst>
         <a:solidFill>
           <a:schemeClr val="phClr"/>
         </a:solidFill>
+        <a:solidFill>
+          <a:schemeClr val="phClr">
+            <a:tint val="95000"/>
+            <a:satMod val="170000"/>
+          </a:schemeClr>
+        </a:solidFill>
         <a:gradFill rotWithShape="1">
           <a:gsLst>
             <a:gs pos="0">
               <a:schemeClr val="phClr">
-                <a:tint val="40000"/>
-                <a:satMod val="350000"/>
+                <a:tint val="93000"/>
+                <a:satMod val="150000"/>
+                <a:shade val="98000"/>
+                <a:lumMod val="102000"/>
               </a:schemeClr>
             </a:gs>
-            <a:gs pos="40000">
+            <a:gs pos="50000">
               <a:schemeClr val="phClr">
-                <a:tint val="45000"/>
-                <a:shade val="99000"/>
-                <a:satMod val="350000"/>
+                <a:tint val="98000"/>
+                <a:satMod val="130000"/>
+                <a:shade val="90000"/>
+                <a:lumMod val="103000"/>
               </a:schemeClr>
             </a:gs>
             <a:gs pos="100000">
               <a:schemeClr val="phClr">
-                <a:shade val="20000"/>
-                <a:satMod val="255000"/>
+                <a:shade val="63000"/>
+                <a:satMod val="120000"/>
               </a:schemeClr>
             </a:gs>
           </a:gsLst>
-          <a:path path="circle">
-            <a:fillToRect l="50000" t="-80000" r="50000" b="180000"/>
-          </a:path>
-        </a:gradFill>
-        <a:gradFill rotWithShape="1">
-          <a:gsLst>
-            <a:gs pos="0">
-              <a:schemeClr val="phClr">
-                <a:tint val="80000"/>
-                <a:satMod val="300000"/>
-              </a:schemeClr>
-            </a:gs>
-            <a:gs pos="100000">
-              <a:schemeClr val="phClr">
-                <a:shade val="30000"/>
-                <a:satMod val="200000"/>
-              </a:schemeClr>
-            </a:gs>
-          </a:gsLst>
-          <a:path path="circle">
-            <a:fillToRect l="50000" t="50000" r="50000" b="50000"/>
-          </a:path>
+          <a:lin ang="5400000" scaled="0"/>
         </a:gradFill>
       </a:bgFillStyleLst>
     </a:fmtScheme>
   </a:themeElements>
   <a:objectDefaults>
-    <a:spDef>
-      <a:spPr/>
-      <a:bodyPr/>
-      <a:lstStyle/>
-      <a:style>
-        <a:lnRef idx="1">
-          <a:schemeClr val="accent1"/>
-        </a:lnRef>
-        <a:fillRef idx="3">
-          <a:schemeClr val="accent1"/>
-        </a:fillRef>
-        <a:effectRef idx="2">
-          <a:schemeClr val="accent1"/>
-        </a:effectRef>
-        <a:fontRef idx="minor">
-          <a:schemeClr val="lt1"/>
-        </a:fontRef>
-      </a:style>
-    </a:spDef>
     <a:lnDef>
       <a:spPr/>
       <a:bodyPr/>
@@ -12123,5 +12490,305 @@
     </a:lnDef>
   </a:objectDefaults>
   <a:extraClrSchemeLst/>
+  <a:extLst>
+    <a:ext uri="{05A4C25C-085E-4340-85A3-A5531E510DB2}">
+      <thm15:themeFamily xmlns:thm15="http://schemas.microsoft.com/office/thememl/2012/main" name="Office Theme" id="{2E142A2C-CD16-42D6-873A-C26D2A0506FA}" vid="{1BDDFF52-6CD6-40A5-AB3C-68EB2F1E4D0A}"/>
+    </a:ext>
+  </a:extLst>
+</a:theme>
+</file>
+
+<file path=ppt/theme/theme2.xml><?xml version="1.0" encoding="utf-8"?>
+<a:theme xmlns:a="http://schemas.openxmlformats.org/drawingml/2006/main" name="Tema do Office">
+  <a:themeElements>
+    <a:clrScheme name="Office">
+      <a:dk1>
+        <a:sysClr val="windowText" lastClr="000000"/>
+      </a:dk1>
+      <a:lt1>
+        <a:sysClr val="window" lastClr="FFFFFF"/>
+      </a:lt1>
+      <a:dk2>
+        <a:srgbClr val="44546A"/>
+      </a:dk2>
+      <a:lt2>
+        <a:srgbClr val="E7E6E6"/>
+      </a:lt2>
+      <a:accent1>
+        <a:srgbClr val="4472C4"/>
+      </a:accent1>
+      <a:accent2>
+        <a:srgbClr val="ED7D31"/>
+      </a:accent2>
+      <a:accent3>
+        <a:srgbClr val="A5A5A5"/>
+      </a:accent3>
+      <a:accent4>
+        <a:srgbClr val="FFC000"/>
+      </a:accent4>
+      <a:accent5>
+        <a:srgbClr val="5B9BD5"/>
+      </a:accent5>
+      <a:accent6>
+        <a:srgbClr val="70AD47"/>
+      </a:accent6>
+      <a:hlink>
+        <a:srgbClr val="0563C1"/>
+      </a:hlink>
+      <a:folHlink>
+        <a:srgbClr val="954F72"/>
+      </a:folHlink>
+    </a:clrScheme>
+    <a:fontScheme name="Office">
+      <a:majorFont>
+        <a:latin typeface="Calibri Light" panose="020F0302020204030204"/>
+        <a:ea typeface=""/>
+        <a:cs typeface=""/>
+        <a:font script="Jpan" typeface="游ゴシック Light"/>
+        <a:font script="Hang" typeface="맑은 고딕"/>
+        <a:font script="Hans" typeface="等线 Light"/>
+        <a:font script="Hant" typeface="新細明體"/>
+        <a:font script="Arab" typeface="Times New Roman"/>
+        <a:font script="Hebr" typeface="Times New Roman"/>
+        <a:font script="Thai" typeface="Angsana New"/>
+        <a:font script="Ethi" typeface="Nyala"/>
+        <a:font script="Beng" typeface="Vrinda"/>
+        <a:font script="Gujr" typeface="Shruti"/>
+        <a:font script="Khmr" typeface="MoolBoran"/>
+        <a:font script="Knda" typeface="Tunga"/>
+        <a:font script="Guru" typeface="Raavi"/>
+        <a:font script="Cans" typeface="Euphemia"/>
+        <a:font script="Cher" typeface="Plantagenet Cherokee"/>
+        <a:font script="Yiii" typeface="Microsoft Yi Baiti"/>
+        <a:font script="Tibt" typeface="Microsoft Himalaya"/>
+        <a:font script="Thaa" typeface="MV Boli"/>
+        <a:font script="Deva" typeface="Mangal"/>
+        <a:font script="Telu" typeface="Gautami"/>
+        <a:font script="Taml" typeface="Latha"/>
+        <a:font script="Syrc" typeface="Estrangelo Edessa"/>
+        <a:font script="Orya" typeface="Kalinga"/>
+        <a:font script="Mlym" typeface="Kartika"/>
+        <a:font script="Laoo" typeface="DokChampa"/>
+        <a:font script="Sinh" typeface="Iskoola Pota"/>
+        <a:font script="Mong" typeface="Mongolian Baiti"/>
+        <a:font script="Viet" typeface="Times New Roman"/>
+        <a:font script="Uigh" typeface="Microsoft Uighur"/>
+        <a:font script="Geor" typeface="Sylfaen"/>
+        <a:font script="Armn" typeface="Arial"/>
+        <a:font script="Bugi" typeface="Leelawadee UI"/>
+        <a:font script="Bopo" typeface="Microsoft JhengHei"/>
+        <a:font script="Java" typeface="Javanese Text"/>
+        <a:font script="Lisu" typeface="Segoe UI"/>
+        <a:font script="Mymr" typeface="Myanmar Text"/>
+        <a:font script="Nkoo" typeface="Ebrima"/>
+        <a:font script="Olck" typeface="Nirmala UI"/>
+        <a:font script="Osma" typeface="Ebrima"/>
+        <a:font script="Phag" typeface="Phagspa"/>
+        <a:font script="Syrn" typeface="Estrangelo Edessa"/>
+        <a:font script="Syrj" typeface="Estrangelo Edessa"/>
+        <a:font script="Syre" typeface="Estrangelo Edessa"/>
+        <a:font script="Sora" typeface="Nirmala UI"/>
+        <a:font script="Tale" typeface="Microsoft Tai Le"/>
+        <a:font script="Talu" typeface="Microsoft New Tai Lue"/>
+        <a:font script="Tfng" typeface="Ebrima"/>
+      </a:majorFont>
+      <a:minorFont>
+        <a:latin typeface="Calibri" panose="020F0502020204030204"/>
+        <a:ea typeface=""/>
+        <a:cs typeface=""/>
+        <a:font script="Jpan" typeface="游ゴシック"/>
+        <a:font script="Hang" typeface="맑은 고딕"/>
+        <a:font script="Hans" typeface="等线"/>
+        <a:font script="Hant" typeface="新細明體"/>
+        <a:font script="Arab" typeface="Arial"/>
+        <a:font script="Hebr" typeface="Arial"/>
+        <a:font script="Thai" typeface="Cordia New"/>
+        <a:font script="Ethi" typeface="Nyala"/>
+        <a:font script="Beng" typeface="Vrinda"/>
+        <a:font script="Gujr" typeface="Shruti"/>
+        <a:font script="Khmr" typeface="DaunPenh"/>
+        <a:font script="Knda" typeface="Tunga"/>
+        <a:font script="Guru" typeface="Raavi"/>
+        <a:font script="Cans" typeface="Euphemia"/>
+        <a:font script="Cher" typeface="Plantagenet Cherokee"/>
+        <a:font script="Yiii" typeface="Microsoft Yi Baiti"/>
+        <a:font script="Tibt" typeface="Microsoft Himalaya"/>
+        <a:font script="Thaa" typeface="MV Boli"/>
+        <a:font script="Deva" typeface="Mangal"/>
+        <a:font script="Telu" typeface="Gautami"/>
+        <a:font script="Taml" typeface="Latha"/>
+        <a:font script="Syrc" typeface="Estrangelo Edessa"/>
+        <a:font script="Orya" typeface="Kalinga"/>
+        <a:font script="Mlym" typeface="Kartika"/>
+        <a:font script="Laoo" typeface="DokChampa"/>
+        <a:font script="Sinh" typeface="Iskoola Pota"/>
+        <a:font script="Mong" typeface="Mongolian Baiti"/>
+        <a:font script="Viet" typeface="Arial"/>
+        <a:font script="Uigh" typeface="Microsoft Uighur"/>
+        <a:font script="Geor" typeface="Sylfaen"/>
+        <a:font script="Armn" typeface="Arial"/>
+        <a:font script="Bugi" typeface="Leelawadee UI"/>
+        <a:font script="Bopo" typeface="Microsoft JhengHei"/>
+        <a:font script="Java" typeface="Javanese Text"/>
+        <a:font script="Lisu" typeface="Segoe UI"/>
+        <a:font script="Mymr" typeface="Myanmar Text"/>
+        <a:font script="Nkoo" typeface="Ebrima"/>
+        <a:font script="Olck" typeface="Nirmala UI"/>
+        <a:font script="Osma" typeface="Ebrima"/>
+        <a:font script="Phag" typeface="Phagspa"/>
+        <a:font script="Syrn" typeface="Estrangelo Edessa"/>
+        <a:font script="Syrj" typeface="Estrangelo Edessa"/>
+        <a:font script="Syre" typeface="Estrangelo Edessa"/>
+        <a:font script="Sora" typeface="Nirmala UI"/>
+        <a:font script="Tale" typeface="Microsoft Tai Le"/>
+        <a:font script="Talu" typeface="Microsoft New Tai Lue"/>
+        <a:font script="Tfng" typeface="Ebrima"/>
+      </a:minorFont>
+    </a:fontScheme>
+    <a:fmtScheme name="Office">
+      <a:fillStyleLst>
+        <a:solidFill>
+          <a:schemeClr val="phClr"/>
+        </a:solidFill>
+        <a:gradFill rotWithShape="1">
+          <a:gsLst>
+            <a:gs pos="0">
+              <a:schemeClr val="phClr">
+                <a:lumMod val="110000"/>
+                <a:satMod val="105000"/>
+                <a:tint val="67000"/>
+              </a:schemeClr>
+            </a:gs>
+            <a:gs pos="50000">
+              <a:schemeClr val="phClr">
+                <a:lumMod val="105000"/>
+                <a:satMod val="103000"/>
+                <a:tint val="73000"/>
+              </a:schemeClr>
+            </a:gs>
+            <a:gs pos="100000">
+              <a:schemeClr val="phClr">
+                <a:lumMod val="105000"/>
+                <a:satMod val="109000"/>
+                <a:tint val="81000"/>
+              </a:schemeClr>
+            </a:gs>
+          </a:gsLst>
+          <a:lin ang="5400000" scaled="0"/>
+        </a:gradFill>
+        <a:gradFill rotWithShape="1">
+          <a:gsLst>
+            <a:gs pos="0">
+              <a:schemeClr val="phClr">
+                <a:satMod val="103000"/>
+                <a:lumMod val="102000"/>
+                <a:tint val="94000"/>
+              </a:schemeClr>
+            </a:gs>
+            <a:gs pos="50000">
+              <a:schemeClr val="phClr">
+                <a:satMod val="110000"/>
+                <a:lumMod val="100000"/>
+                <a:shade val="100000"/>
+              </a:schemeClr>
+            </a:gs>
+            <a:gs pos="100000">
+              <a:schemeClr val="phClr">
+                <a:lumMod val="99000"/>
+                <a:satMod val="120000"/>
+                <a:shade val="78000"/>
+              </a:schemeClr>
+            </a:gs>
+          </a:gsLst>
+          <a:lin ang="5400000" scaled="0"/>
+        </a:gradFill>
+      </a:fillStyleLst>
+      <a:lnStyleLst>
+        <a:ln w="6350" cap="flat" cmpd="sng" algn="ctr">
+          <a:solidFill>
+            <a:schemeClr val="phClr"/>
+          </a:solidFill>
+          <a:prstDash val="solid"/>
+          <a:miter lim="800000"/>
+        </a:ln>
+        <a:ln w="12700" cap="flat" cmpd="sng" algn="ctr">
+          <a:solidFill>
+            <a:schemeClr val="phClr"/>
+          </a:solidFill>
+          <a:prstDash val="solid"/>
+          <a:miter lim="800000"/>
+        </a:ln>
+        <a:ln w="19050" cap="flat" cmpd="sng" algn="ctr">
+          <a:solidFill>
+            <a:schemeClr val="phClr"/>
+          </a:solidFill>
+          <a:prstDash val="solid"/>
+          <a:miter lim="800000"/>
+        </a:ln>
+      </a:lnStyleLst>
+      <a:effectStyleLst>
+        <a:effectStyle>
+          <a:effectLst/>
+        </a:effectStyle>
+        <a:effectStyle>
+          <a:effectLst/>
+        </a:effectStyle>
+        <a:effectStyle>
+          <a:effectLst>
+            <a:outerShdw blurRad="57150" dist="19050" dir="5400000" algn="ctr" rotWithShape="0">
+              <a:srgbClr val="000000">
+                <a:alpha val="63000"/>
+              </a:srgbClr>
+            </a:outerShdw>
+          </a:effectLst>
+        </a:effectStyle>
+      </a:effectStyleLst>
+      <a:bgFillStyleLst>
+        <a:solidFill>
+          <a:schemeClr val="phClr"/>
+        </a:solidFill>
+        <a:solidFill>
+          <a:schemeClr val="phClr">
+            <a:tint val="95000"/>
+            <a:satMod val="170000"/>
+          </a:schemeClr>
+        </a:solidFill>
+        <a:gradFill rotWithShape="1">
+          <a:gsLst>
+            <a:gs pos="0">
+              <a:schemeClr val="phClr">
+                <a:tint val="93000"/>
+                <a:satMod val="150000"/>
+                <a:shade val="98000"/>
+                <a:lumMod val="102000"/>
+              </a:schemeClr>
+            </a:gs>
+            <a:gs pos="50000">
+              <a:schemeClr val="phClr">
+                <a:tint val="98000"/>
+                <a:satMod val="130000"/>
+                <a:shade val="90000"/>
+                <a:lumMod val="103000"/>
+              </a:schemeClr>
+            </a:gs>
+            <a:gs pos="100000">
+              <a:schemeClr val="phClr">
+                <a:shade val="63000"/>
+                <a:satMod val="120000"/>
+              </a:schemeClr>
+            </a:gs>
+          </a:gsLst>
+          <a:lin ang="5400000" scaled="0"/>
+        </a:gradFill>
+      </a:bgFillStyleLst>
+    </a:fmtScheme>
+  </a:themeElements>
+  <a:objectDefaults/>
+  <a:extraClrSchemeLst/>
+  <a:extLst>
+    <a:ext uri="{05A4C25C-085E-4340-85A3-A5531E510DB2}">
+      <thm15:themeFamily xmlns:thm15="http://schemas.microsoft.com/office/thememl/2012/main" name="Office Theme" id="{62F939B6-93AF-4DB8-9C6B-D6C7DFDC589F}" vid="{4A3C46E8-61CC-4603-A589-7422A47A8E4A}"/>
+    </a:ext>
+  </a:extLst>
 </a:theme>
 </file>